--- a/notes/Unit 2/Control_Statements_in_Python.pptx
+++ b/notes/Unit 2/Control_Statements_in_Python.pptx
@@ -1,31 +1,31 @@
 
 <file path=ppt/presentation.xml><?xml version="1.0" encoding="utf-8"?>
-<p:presentation xmlns:a="http://schemas.openxmlformats.org/drawingml/2006/main" xmlns:r="http://schemas.openxmlformats.org/officeDocument/2006/relationships" xmlns:p="http://schemas.openxmlformats.org/presentationml/2006/main" saveSubsetFonts="1">
+<p:presentation xmlns:a="http://schemas.openxmlformats.org/drawingml/2006/main" xmlns:r="http://schemas.openxmlformats.org/officeDocument/2006/relationships" xmlns:p="http://schemas.openxmlformats.org/presentationml/2006/main">
   <p:sldMasterIdLst>
     <p:sldMasterId id="2147483648" r:id="rId1"/>
   </p:sldMasterIdLst>
   <p:notesMasterIdLst>
-    <p:notesMasterId r:id="rId20"/>
+    <p:notesMasterId r:id="rId8"/>
   </p:notesMasterIdLst>
   <p:sldIdLst>
-    <p:sldId id="256" r:id="rId2"/>
-    <p:sldId id="290" r:id="rId3"/>
-    <p:sldId id="259" r:id="rId4"/>
-    <p:sldId id="291" r:id="rId5"/>
-    <p:sldId id="279" r:id="rId6"/>
-    <p:sldId id="270" r:id="rId7"/>
-    <p:sldId id="280" r:id="rId8"/>
-    <p:sldId id="281" r:id="rId9"/>
-    <p:sldId id="282" r:id="rId10"/>
-    <p:sldId id="292" r:id="rId11"/>
-    <p:sldId id="283" r:id="rId12"/>
-    <p:sldId id="284" r:id="rId13"/>
-    <p:sldId id="285" r:id="rId14"/>
-    <p:sldId id="286" r:id="rId15"/>
-    <p:sldId id="293" r:id="rId16"/>
-    <p:sldId id="287" r:id="rId17"/>
-    <p:sldId id="288" r:id="rId18"/>
-    <p:sldId id="289" r:id="rId19"/>
+    <p:sldId id="256" r:id="rId3"/>
+    <p:sldId id="290" r:id="rId4"/>
+    <p:sldId id="259" r:id="rId5"/>
+    <p:sldId id="291" r:id="rId6"/>
+    <p:sldId id="279" r:id="rId7"/>
+    <p:sldId id="270" r:id="rId9"/>
+    <p:sldId id="280" r:id="rId10"/>
+    <p:sldId id="281" r:id="rId11"/>
+    <p:sldId id="282" r:id="rId12"/>
+    <p:sldId id="292" r:id="rId13"/>
+    <p:sldId id="283" r:id="rId14"/>
+    <p:sldId id="284" r:id="rId15"/>
+    <p:sldId id="285" r:id="rId16"/>
+    <p:sldId id="286" r:id="rId17"/>
+    <p:sldId id="293" r:id="rId18"/>
+    <p:sldId id="287" r:id="rId19"/>
+    <p:sldId id="288" r:id="rId20"/>
+    <p:sldId id="289" r:id="rId21"/>
   </p:sldIdLst>
   <p:sldSz cx="9144000" cy="6858000" type="screen4x3"/>
   <p:notesSz cx="6858000" cy="9144000"/>
@@ -124,6 +124,22 @@
       </a:defRPr>
     </a:lvl9pPr>
   </p:defaultTextStyle>
+  <p:extLst>
+    <p:ext uri="{EFAFB233-063F-42B5-8137-9DF3F51BA10A}">
+      <p15:sldGuideLst xmlns:p15="http://schemas.microsoft.com/office/powerpoint/2012/main">
+        <p15:guide id="1" orient="horz" pos="2160" userDrawn="1">
+          <p15:clr>
+            <a:srgbClr val="A4A3A4"/>
+          </p15:clr>
+        </p15:guide>
+        <p15:guide id="2" pos="2880" userDrawn="1">
+          <p15:clr>
+            <a:srgbClr val="A4A3A4"/>
+          </p15:clr>
+        </p15:guide>
+      </p15:sldGuideLst>
+    </p:ext>
+  </p:extLst>
 </p:presentation>
 </file>
 
@@ -209,8 +225,6 @@
           <a:p>
             <a:fld id="{9B96348D-CBF3-45CE-AC51-769C2203D1B6}" type="datetimeFigureOut">
               <a:rPr lang="en-US" smtClean="0"/>
-              <a:pPr/>
-              <a:t>7/5/2020</a:t>
             </a:fld>
             <a:endParaRPr lang="en-US"/>
           </a:p>
@@ -279,6 +293,7 @@
               <a:rPr lang="en-US" smtClean="0"/>
               <a:t>Click to edit Master text styles</a:t>
             </a:r>
+            <a:endParaRPr lang="en-US" smtClean="0"/>
           </a:p>
           <a:p>
             <a:pPr lvl="1"/>
@@ -286,6 +301,7 @@
               <a:rPr lang="en-US" smtClean="0"/>
               <a:t>Second level</a:t>
             </a:r>
+            <a:endParaRPr lang="en-US" smtClean="0"/>
           </a:p>
           <a:p>
             <a:pPr lvl="2"/>
@@ -293,6 +309,7 @@
               <a:rPr lang="en-US" smtClean="0"/>
               <a:t>Third level</a:t>
             </a:r>
+            <a:endParaRPr lang="en-US" smtClean="0"/>
           </a:p>
           <a:p>
             <a:pPr lvl="3"/>
@@ -300,6 +317,7 @@
               <a:rPr lang="en-US" smtClean="0"/>
               <a:t>Fourth level</a:t>
             </a:r>
+            <a:endParaRPr lang="en-US" smtClean="0"/>
           </a:p>
           <a:p>
             <a:pPr lvl="4"/>
@@ -371,8 +389,6 @@
           <a:p>
             <a:fld id="{3618E36A-D260-42E8-AE69-589A167AF4F7}" type="slidenum">
               <a:rPr lang="en-US" smtClean="0"/>
-              <a:pPr/>
-              <a:t>‹#›</a:t>
             </a:fld>
             <a:endParaRPr lang="en-US"/>
           </a:p>
@@ -543,8 +559,6 @@
           <a:p>
             <a:fld id="{3618E36A-D260-42E8-AE69-589A167AF4F7}" type="slidenum">
               <a:rPr lang="en-US" smtClean="0"/>
-              <a:pPr/>
-              <a:t>5</a:t>
             </a:fld>
             <a:endParaRPr lang="en-US"/>
           </a:p>
@@ -625,8 +639,6 @@
           <a:p>
             <a:fld id="{3618E36A-D260-42E8-AE69-589A167AF4F7}" type="slidenum">
               <a:rPr lang="en-US" smtClean="0"/>
-              <a:pPr/>
-              <a:t>7</a:t>
             </a:fld>
             <a:endParaRPr lang="en-US"/>
           </a:p>
@@ -707,8 +719,6 @@
           <a:p>
             <a:fld id="{3618E36A-D260-42E8-AE69-589A167AF4F7}" type="slidenum">
               <a:rPr lang="en-US" smtClean="0"/>
-              <a:pPr/>
-              <a:t>8</a:t>
             </a:fld>
             <a:endParaRPr lang="en-US"/>
           </a:p>
@@ -789,8 +799,6 @@
           <a:p>
             <a:fld id="{3618E36A-D260-42E8-AE69-589A167AF4F7}" type="slidenum">
               <a:rPr lang="en-US" smtClean="0"/>
-              <a:pPr/>
-              <a:t>9</a:t>
             </a:fld>
             <a:endParaRPr lang="en-US"/>
           </a:p>
@@ -871,8 +879,6 @@
           <a:p>
             <a:fld id="{3618E36A-D260-42E8-AE69-589A167AF4F7}" type="slidenum">
               <a:rPr lang="en-US" smtClean="0"/>
-              <a:pPr/>
-              <a:t>11</a:t>
             </a:fld>
             <a:endParaRPr lang="en-US"/>
           </a:p>
@@ -953,8 +959,6 @@
           <a:p>
             <a:fld id="{3618E36A-D260-42E8-AE69-589A167AF4F7}" type="slidenum">
               <a:rPr lang="en-US" smtClean="0"/>
-              <a:pPr/>
-              <a:t>16</a:t>
             </a:fld>
             <a:endParaRPr lang="en-US"/>
           </a:p>
@@ -1149,8 +1153,6 @@
           <a:p>
             <a:fld id="{BEC9DB85-5EE8-4E80-AD27-8C22B74789B3}" type="datetimeFigureOut">
               <a:rPr lang="en-US" smtClean="0"/>
-              <a:pPr/>
-              <a:t>7/5/2020</a:t>
             </a:fld>
             <a:endParaRPr lang="en-US"/>
           </a:p>
@@ -1192,8 +1194,6 @@
           <a:p>
             <a:fld id="{18C55F5E-5CC4-48A2-94FE-FDC3CB0B79E9}" type="slidenum">
               <a:rPr lang="en-US" smtClean="0"/>
-              <a:pPr/>
-              <a:t>‹#›</a:t>
             </a:fld>
             <a:endParaRPr lang="en-US"/>
           </a:p>
@@ -1267,6 +1267,7 @@
               <a:rPr lang="en-US" smtClean="0"/>
               <a:t>Click to edit Master text styles</a:t>
             </a:r>
+            <a:endParaRPr lang="en-US" smtClean="0"/>
           </a:p>
           <a:p>
             <a:pPr lvl="1"/>
@@ -1274,6 +1275,7 @@
               <a:rPr lang="en-US" smtClean="0"/>
               <a:t>Second level</a:t>
             </a:r>
+            <a:endParaRPr lang="en-US" smtClean="0"/>
           </a:p>
           <a:p>
             <a:pPr lvl="2"/>
@@ -1281,6 +1283,7 @@
               <a:rPr lang="en-US" smtClean="0"/>
               <a:t>Third level</a:t>
             </a:r>
+            <a:endParaRPr lang="en-US" smtClean="0"/>
           </a:p>
           <a:p>
             <a:pPr lvl="3"/>
@@ -1288,6 +1291,7 @@
               <a:rPr lang="en-US" smtClean="0"/>
               <a:t>Fourth level</a:t>
             </a:r>
+            <a:endParaRPr lang="en-US" smtClean="0"/>
           </a:p>
           <a:p>
             <a:pPr lvl="4"/>
@@ -1316,8 +1320,6 @@
           <a:p>
             <a:fld id="{BEC9DB85-5EE8-4E80-AD27-8C22B74789B3}" type="datetimeFigureOut">
               <a:rPr lang="en-US" smtClean="0"/>
-              <a:pPr/>
-              <a:t>7/5/2020</a:t>
             </a:fld>
             <a:endParaRPr lang="en-US"/>
           </a:p>
@@ -1359,8 +1361,6 @@
           <a:p>
             <a:fld id="{18C55F5E-5CC4-48A2-94FE-FDC3CB0B79E9}" type="slidenum">
               <a:rPr lang="en-US" smtClean="0"/>
-              <a:pPr/>
-              <a:t>‹#›</a:t>
             </a:fld>
             <a:endParaRPr lang="en-US"/>
           </a:p>
@@ -1444,6 +1444,7 @@
               <a:rPr lang="en-US" smtClean="0"/>
               <a:t>Click to edit Master text styles</a:t>
             </a:r>
+            <a:endParaRPr lang="en-US" smtClean="0"/>
           </a:p>
           <a:p>
             <a:pPr lvl="1"/>
@@ -1451,6 +1452,7 @@
               <a:rPr lang="en-US" smtClean="0"/>
               <a:t>Second level</a:t>
             </a:r>
+            <a:endParaRPr lang="en-US" smtClean="0"/>
           </a:p>
           <a:p>
             <a:pPr lvl="2"/>
@@ -1458,6 +1460,7 @@
               <a:rPr lang="en-US" smtClean="0"/>
               <a:t>Third level</a:t>
             </a:r>
+            <a:endParaRPr lang="en-US" smtClean="0"/>
           </a:p>
           <a:p>
             <a:pPr lvl="3"/>
@@ -1465,6 +1468,7 @@
               <a:rPr lang="en-US" smtClean="0"/>
               <a:t>Fourth level</a:t>
             </a:r>
+            <a:endParaRPr lang="en-US" smtClean="0"/>
           </a:p>
           <a:p>
             <a:pPr lvl="4"/>
@@ -1493,8 +1497,6 @@
           <a:p>
             <a:fld id="{BEC9DB85-5EE8-4E80-AD27-8C22B74789B3}" type="datetimeFigureOut">
               <a:rPr lang="en-US" smtClean="0"/>
-              <a:pPr/>
-              <a:t>7/5/2020</a:t>
             </a:fld>
             <a:endParaRPr lang="en-US"/>
           </a:p>
@@ -1536,8 +1538,6 @@
           <a:p>
             <a:fld id="{18C55F5E-5CC4-48A2-94FE-FDC3CB0B79E9}" type="slidenum">
               <a:rPr lang="en-US" smtClean="0"/>
-              <a:pPr/>
-              <a:t>‹#›</a:t>
             </a:fld>
             <a:endParaRPr lang="en-US"/>
           </a:p>
@@ -1611,6 +1611,7 @@
               <a:rPr lang="en-US" smtClean="0"/>
               <a:t>Click to edit Master text styles</a:t>
             </a:r>
+            <a:endParaRPr lang="en-US" smtClean="0"/>
           </a:p>
           <a:p>
             <a:pPr lvl="1"/>
@@ -1618,6 +1619,7 @@
               <a:rPr lang="en-US" smtClean="0"/>
               <a:t>Second level</a:t>
             </a:r>
+            <a:endParaRPr lang="en-US" smtClean="0"/>
           </a:p>
           <a:p>
             <a:pPr lvl="2"/>
@@ -1625,6 +1627,7 @@
               <a:rPr lang="en-US" smtClean="0"/>
               <a:t>Third level</a:t>
             </a:r>
+            <a:endParaRPr lang="en-US" smtClean="0"/>
           </a:p>
           <a:p>
             <a:pPr lvl="3"/>
@@ -1632,6 +1635,7 @@
               <a:rPr lang="en-US" smtClean="0"/>
               <a:t>Fourth level</a:t>
             </a:r>
+            <a:endParaRPr lang="en-US" smtClean="0"/>
           </a:p>
           <a:p>
             <a:pPr lvl="4"/>
@@ -1660,8 +1664,6 @@
           <a:p>
             <a:fld id="{BEC9DB85-5EE8-4E80-AD27-8C22B74789B3}" type="datetimeFigureOut">
               <a:rPr lang="en-US" smtClean="0"/>
-              <a:pPr/>
-              <a:t>7/5/2020</a:t>
             </a:fld>
             <a:endParaRPr lang="en-US"/>
           </a:p>
@@ -1703,8 +1705,6 @@
           <a:p>
             <a:fld id="{18C55F5E-5CC4-48A2-94FE-FDC3CB0B79E9}" type="slidenum">
               <a:rPr lang="en-US" smtClean="0"/>
-              <a:pPr/>
-              <a:t>‹#›</a:t>
             </a:fld>
             <a:endParaRPr lang="en-US"/>
           </a:p>
@@ -1883,6 +1883,7 @@
               <a:rPr lang="en-US" smtClean="0"/>
               <a:t>Click to edit Master text styles</a:t>
             </a:r>
+            <a:endParaRPr lang="en-US" smtClean="0"/>
           </a:p>
         </p:txBody>
       </p:sp>
@@ -1903,8 +1904,6 @@
           <a:p>
             <a:fld id="{BEC9DB85-5EE8-4E80-AD27-8C22B74789B3}" type="datetimeFigureOut">
               <a:rPr lang="en-US" smtClean="0"/>
-              <a:pPr/>
-              <a:t>7/5/2020</a:t>
             </a:fld>
             <a:endParaRPr lang="en-US"/>
           </a:p>
@@ -1946,8 +1945,6 @@
           <a:p>
             <a:fld id="{18C55F5E-5CC4-48A2-94FE-FDC3CB0B79E9}" type="slidenum">
               <a:rPr lang="en-US" smtClean="0"/>
-              <a:pPr/>
-              <a:t>‹#›</a:t>
             </a:fld>
             <a:endParaRPr lang="en-US"/>
           </a:p>
@@ -2054,6 +2051,7 @@
               <a:rPr lang="en-US" smtClean="0"/>
               <a:t>Click to edit Master text styles</a:t>
             </a:r>
+            <a:endParaRPr lang="en-US" smtClean="0"/>
           </a:p>
           <a:p>
             <a:pPr lvl="1"/>
@@ -2061,6 +2059,7 @@
               <a:rPr lang="en-US" smtClean="0"/>
               <a:t>Second level</a:t>
             </a:r>
+            <a:endParaRPr lang="en-US" smtClean="0"/>
           </a:p>
           <a:p>
             <a:pPr lvl="2"/>
@@ -2068,6 +2067,7 @@
               <a:rPr lang="en-US" smtClean="0"/>
               <a:t>Third level</a:t>
             </a:r>
+            <a:endParaRPr lang="en-US" smtClean="0"/>
           </a:p>
           <a:p>
             <a:pPr lvl="3"/>
@@ -2075,6 +2075,7 @@
               <a:rPr lang="en-US" smtClean="0"/>
               <a:t>Fourth level</a:t>
             </a:r>
+            <a:endParaRPr lang="en-US" smtClean="0"/>
           </a:p>
           <a:p>
             <a:pPr lvl="4"/>
@@ -2139,6 +2140,7 @@
               <a:rPr lang="en-US" smtClean="0"/>
               <a:t>Click to edit Master text styles</a:t>
             </a:r>
+            <a:endParaRPr lang="en-US" smtClean="0"/>
           </a:p>
           <a:p>
             <a:pPr lvl="1"/>
@@ -2146,6 +2148,7 @@
               <a:rPr lang="en-US" smtClean="0"/>
               <a:t>Second level</a:t>
             </a:r>
+            <a:endParaRPr lang="en-US" smtClean="0"/>
           </a:p>
           <a:p>
             <a:pPr lvl="2"/>
@@ -2153,6 +2156,7 @@
               <a:rPr lang="en-US" smtClean="0"/>
               <a:t>Third level</a:t>
             </a:r>
+            <a:endParaRPr lang="en-US" smtClean="0"/>
           </a:p>
           <a:p>
             <a:pPr lvl="3"/>
@@ -2160,6 +2164,7 @@
               <a:rPr lang="en-US" smtClean="0"/>
               <a:t>Fourth level</a:t>
             </a:r>
+            <a:endParaRPr lang="en-US" smtClean="0"/>
           </a:p>
           <a:p>
             <a:pPr lvl="4"/>
@@ -2188,8 +2193,6 @@
           <a:p>
             <a:fld id="{BEC9DB85-5EE8-4E80-AD27-8C22B74789B3}" type="datetimeFigureOut">
               <a:rPr lang="en-US" smtClean="0"/>
-              <a:pPr/>
-              <a:t>7/5/2020</a:t>
             </a:fld>
             <a:endParaRPr lang="en-US"/>
           </a:p>
@@ -2231,8 +2234,6 @@
           <a:p>
             <a:fld id="{18C55F5E-5CC4-48A2-94FE-FDC3CB0B79E9}" type="slidenum">
               <a:rPr lang="en-US" smtClean="0"/>
-              <a:pPr/>
-              <a:t>‹#›</a:t>
             </a:fld>
             <a:endParaRPr lang="en-US"/>
           </a:p>
@@ -2352,6 +2353,7 @@
               <a:rPr lang="en-US" smtClean="0"/>
               <a:t>Click to edit Master text styles</a:t>
             </a:r>
+            <a:endParaRPr lang="en-US" smtClean="0"/>
           </a:p>
         </p:txBody>
       </p:sp>
@@ -2408,6 +2410,7 @@
               <a:rPr lang="en-US" smtClean="0"/>
               <a:t>Click to edit Master text styles</a:t>
             </a:r>
+            <a:endParaRPr lang="en-US" smtClean="0"/>
           </a:p>
           <a:p>
             <a:pPr lvl="1"/>
@@ -2415,6 +2418,7 @@
               <a:rPr lang="en-US" smtClean="0"/>
               <a:t>Second level</a:t>
             </a:r>
+            <a:endParaRPr lang="en-US" smtClean="0"/>
           </a:p>
           <a:p>
             <a:pPr lvl="2"/>
@@ -2422,6 +2426,7 @@
               <a:rPr lang="en-US" smtClean="0"/>
               <a:t>Third level</a:t>
             </a:r>
+            <a:endParaRPr lang="en-US" smtClean="0"/>
           </a:p>
           <a:p>
             <a:pPr lvl="3"/>
@@ -2429,6 +2434,7 @@
               <a:rPr lang="en-US" smtClean="0"/>
               <a:t>Fourth level</a:t>
             </a:r>
+            <a:endParaRPr lang="en-US" smtClean="0"/>
           </a:p>
           <a:p>
             <a:pPr lvl="4"/>
@@ -2502,6 +2508,7 @@
               <a:rPr lang="en-US" smtClean="0"/>
               <a:t>Click to edit Master text styles</a:t>
             </a:r>
+            <a:endParaRPr lang="en-US" smtClean="0"/>
           </a:p>
         </p:txBody>
       </p:sp>
@@ -2558,6 +2565,7 @@
               <a:rPr lang="en-US" smtClean="0"/>
               <a:t>Click to edit Master text styles</a:t>
             </a:r>
+            <a:endParaRPr lang="en-US" smtClean="0"/>
           </a:p>
           <a:p>
             <a:pPr lvl="1"/>
@@ -2565,6 +2573,7 @@
               <a:rPr lang="en-US" smtClean="0"/>
               <a:t>Second level</a:t>
             </a:r>
+            <a:endParaRPr lang="en-US" smtClean="0"/>
           </a:p>
           <a:p>
             <a:pPr lvl="2"/>
@@ -2572,6 +2581,7 @@
               <a:rPr lang="en-US" smtClean="0"/>
               <a:t>Third level</a:t>
             </a:r>
+            <a:endParaRPr lang="en-US" smtClean="0"/>
           </a:p>
           <a:p>
             <a:pPr lvl="3"/>
@@ -2579,6 +2589,7 @@
               <a:rPr lang="en-US" smtClean="0"/>
               <a:t>Fourth level</a:t>
             </a:r>
+            <a:endParaRPr lang="en-US" smtClean="0"/>
           </a:p>
           <a:p>
             <a:pPr lvl="4"/>
@@ -2607,8 +2618,6 @@
           <a:p>
             <a:fld id="{BEC9DB85-5EE8-4E80-AD27-8C22B74789B3}" type="datetimeFigureOut">
               <a:rPr lang="en-US" smtClean="0"/>
-              <a:pPr/>
-              <a:t>7/5/2020</a:t>
             </a:fld>
             <a:endParaRPr lang="en-US"/>
           </a:p>
@@ -2650,8 +2659,6 @@
           <a:p>
             <a:fld id="{18C55F5E-5CC4-48A2-94FE-FDC3CB0B79E9}" type="slidenum">
               <a:rPr lang="en-US" smtClean="0"/>
-              <a:pPr/>
-              <a:t>‹#›</a:t>
             </a:fld>
             <a:endParaRPr lang="en-US"/>
           </a:p>
@@ -2722,8 +2729,6 @@
           <a:p>
             <a:fld id="{BEC9DB85-5EE8-4E80-AD27-8C22B74789B3}" type="datetimeFigureOut">
               <a:rPr lang="en-US" smtClean="0"/>
-              <a:pPr/>
-              <a:t>7/5/2020</a:t>
             </a:fld>
             <a:endParaRPr lang="en-US"/>
           </a:p>
@@ -2765,8 +2770,6 @@
           <a:p>
             <a:fld id="{18C55F5E-5CC4-48A2-94FE-FDC3CB0B79E9}" type="slidenum">
               <a:rPr lang="en-US" smtClean="0"/>
-              <a:pPr/>
-              <a:t>‹#›</a:t>
             </a:fld>
             <a:endParaRPr lang="en-US"/>
           </a:p>
@@ -2814,8 +2817,6 @@
           <a:p>
             <a:fld id="{BEC9DB85-5EE8-4E80-AD27-8C22B74789B3}" type="datetimeFigureOut">
               <a:rPr lang="en-US" smtClean="0"/>
-              <a:pPr/>
-              <a:t>7/5/2020</a:t>
             </a:fld>
             <a:endParaRPr lang="en-US"/>
           </a:p>
@@ -2857,8 +2858,6 @@
           <a:p>
             <a:fld id="{18C55F5E-5CC4-48A2-94FE-FDC3CB0B79E9}" type="slidenum">
               <a:rPr lang="en-US" smtClean="0"/>
-              <a:pPr/>
-              <a:t>‹#›</a:t>
             </a:fld>
             <a:endParaRPr lang="en-US"/>
           </a:p>
@@ -2974,6 +2973,7 @@
               <a:rPr lang="en-US" smtClean="0"/>
               <a:t>Click to edit Master text styles</a:t>
             </a:r>
+            <a:endParaRPr lang="en-US" smtClean="0"/>
           </a:p>
           <a:p>
             <a:pPr lvl="1"/>
@@ -2981,6 +2981,7 @@
               <a:rPr lang="en-US" smtClean="0"/>
               <a:t>Second level</a:t>
             </a:r>
+            <a:endParaRPr lang="en-US" smtClean="0"/>
           </a:p>
           <a:p>
             <a:pPr lvl="2"/>
@@ -2988,6 +2989,7 @@
               <a:rPr lang="en-US" smtClean="0"/>
               <a:t>Third level</a:t>
             </a:r>
+            <a:endParaRPr lang="en-US" smtClean="0"/>
           </a:p>
           <a:p>
             <a:pPr lvl="3"/>
@@ -2995,6 +2997,7 @@
               <a:rPr lang="en-US" smtClean="0"/>
               <a:t>Fourth level</a:t>
             </a:r>
+            <a:endParaRPr lang="en-US" smtClean="0"/>
           </a:p>
           <a:p>
             <a:pPr lvl="4"/>
@@ -3068,6 +3071,7 @@
               <a:rPr lang="en-US" smtClean="0"/>
               <a:t>Click to edit Master text styles</a:t>
             </a:r>
+            <a:endParaRPr lang="en-US" smtClean="0"/>
           </a:p>
         </p:txBody>
       </p:sp>
@@ -3088,8 +3092,6 @@
           <a:p>
             <a:fld id="{BEC9DB85-5EE8-4E80-AD27-8C22B74789B3}" type="datetimeFigureOut">
               <a:rPr lang="en-US" smtClean="0"/>
-              <a:pPr/>
-              <a:t>7/5/2020</a:t>
             </a:fld>
             <a:endParaRPr lang="en-US"/>
           </a:p>
@@ -3131,8 +3133,6 @@
           <a:p>
             <a:fld id="{18C55F5E-5CC4-48A2-94FE-FDC3CB0B79E9}" type="slidenum">
               <a:rPr lang="en-US" smtClean="0"/>
-              <a:pPr/>
-              <a:t>‹#›</a:t>
             </a:fld>
             <a:endParaRPr lang="en-US"/>
           </a:p>
@@ -3318,6 +3318,7 @@
               <a:rPr lang="en-US" smtClean="0"/>
               <a:t>Click to edit Master text styles</a:t>
             </a:r>
+            <a:endParaRPr lang="en-US" smtClean="0"/>
           </a:p>
         </p:txBody>
       </p:sp>
@@ -3338,8 +3339,6 @@
           <a:p>
             <a:fld id="{BEC9DB85-5EE8-4E80-AD27-8C22B74789B3}" type="datetimeFigureOut">
               <a:rPr lang="en-US" smtClean="0"/>
-              <a:pPr/>
-              <a:t>7/5/2020</a:t>
             </a:fld>
             <a:endParaRPr lang="en-US"/>
           </a:p>
@@ -3381,8 +3380,6 @@
           <a:p>
             <a:fld id="{18C55F5E-5CC4-48A2-94FE-FDC3CB0B79E9}" type="slidenum">
               <a:rPr lang="en-US" smtClean="0"/>
-              <a:pPr/>
-              <a:t>‹#›</a:t>
             </a:fld>
             <a:endParaRPr lang="en-US"/>
           </a:p>
@@ -3481,6 +3478,7 @@
               <a:rPr lang="en-US" smtClean="0"/>
               <a:t>Click to edit Master text styles</a:t>
             </a:r>
+            <a:endParaRPr lang="en-US" smtClean="0"/>
           </a:p>
           <a:p>
             <a:pPr lvl="1"/>
@@ -3488,6 +3486,7 @@
               <a:rPr lang="en-US" smtClean="0"/>
               <a:t>Second level</a:t>
             </a:r>
+            <a:endParaRPr lang="en-US" smtClean="0"/>
           </a:p>
           <a:p>
             <a:pPr lvl="2"/>
@@ -3495,6 +3494,7 @@
               <a:rPr lang="en-US" smtClean="0"/>
               <a:t>Third level</a:t>
             </a:r>
+            <a:endParaRPr lang="en-US" smtClean="0"/>
           </a:p>
           <a:p>
             <a:pPr lvl="3"/>
@@ -3502,6 +3502,7 @@
               <a:rPr lang="en-US" smtClean="0"/>
               <a:t>Fourth level</a:t>
             </a:r>
+            <a:endParaRPr lang="en-US" smtClean="0"/>
           </a:p>
           <a:p>
             <a:pPr lvl="4"/>
@@ -3548,8 +3549,6 @@
           <a:p>
             <a:fld id="{BEC9DB85-5EE8-4E80-AD27-8C22B74789B3}" type="datetimeFigureOut">
               <a:rPr lang="en-US" smtClean="0"/>
-              <a:pPr/>
-              <a:t>7/5/2020</a:t>
             </a:fld>
             <a:endParaRPr lang="en-US"/>
           </a:p>
@@ -3627,8 +3626,6 @@
           <a:p>
             <a:fld id="{18C55F5E-5CC4-48A2-94FE-FDC3CB0B79E9}" type="slidenum">
               <a:rPr lang="en-US" smtClean="0"/>
-              <a:pPr/>
-              <a:t>‹#›</a:t>
             </a:fld>
             <a:endParaRPr lang="en-US"/>
           </a:p>
@@ -3672,7 +3669,7 @@
         <a:spcBef>
           <a:spcPct val="20000"/>
         </a:spcBef>
-        <a:buFont typeface="Arial" pitchFamily="34" charset="0"/>
+        <a:buFont typeface="Arial" panose="020B0604020202020204" pitchFamily="34" charset="0"/>
         <a:buChar char="•"/>
         <a:defRPr sz="3200" kern="1200">
           <a:solidFill>
@@ -3687,7 +3684,7 @@
         <a:spcBef>
           <a:spcPct val="20000"/>
         </a:spcBef>
-        <a:buFont typeface="Arial" pitchFamily="34" charset="0"/>
+        <a:buFont typeface="Arial" panose="020B0604020202020204" pitchFamily="34" charset="0"/>
         <a:buChar char="–"/>
         <a:defRPr sz="2800" kern="1200">
           <a:solidFill>
@@ -3702,7 +3699,7 @@
         <a:spcBef>
           <a:spcPct val="20000"/>
         </a:spcBef>
-        <a:buFont typeface="Arial" pitchFamily="34" charset="0"/>
+        <a:buFont typeface="Arial" panose="020B0604020202020204" pitchFamily="34" charset="0"/>
         <a:buChar char="•"/>
         <a:defRPr sz="2400" kern="1200">
           <a:solidFill>
@@ -3717,7 +3714,7 @@
         <a:spcBef>
           <a:spcPct val="20000"/>
         </a:spcBef>
-        <a:buFont typeface="Arial" pitchFamily="34" charset="0"/>
+        <a:buFont typeface="Arial" panose="020B0604020202020204" pitchFamily="34" charset="0"/>
         <a:buChar char="–"/>
         <a:defRPr sz="2000" kern="1200">
           <a:solidFill>
@@ -3732,7 +3729,7 @@
         <a:spcBef>
           <a:spcPct val="20000"/>
         </a:spcBef>
-        <a:buFont typeface="Arial" pitchFamily="34" charset="0"/>
+        <a:buFont typeface="Arial" panose="020B0604020202020204" pitchFamily="34" charset="0"/>
         <a:buChar char="»"/>
         <a:defRPr sz="2000" kern="1200">
           <a:solidFill>
@@ -3747,7 +3744,7 @@
         <a:spcBef>
           <a:spcPct val="20000"/>
         </a:spcBef>
-        <a:buFont typeface="Arial" pitchFamily="34" charset="0"/>
+        <a:buFont typeface="Arial" panose="020B0604020202020204" pitchFamily="34" charset="0"/>
         <a:buChar char="•"/>
         <a:defRPr sz="2000" kern="1200">
           <a:solidFill>
@@ -3762,7 +3759,7 @@
         <a:spcBef>
           <a:spcPct val="20000"/>
         </a:spcBef>
-        <a:buFont typeface="Arial" pitchFamily="34" charset="0"/>
+        <a:buFont typeface="Arial" panose="020B0604020202020204" pitchFamily="34" charset="0"/>
         <a:buChar char="•"/>
         <a:defRPr sz="2000" kern="1200">
           <a:solidFill>
@@ -3777,7 +3774,7 @@
         <a:spcBef>
           <a:spcPct val="20000"/>
         </a:spcBef>
-        <a:buFont typeface="Arial" pitchFamily="34" charset="0"/>
+        <a:buFont typeface="Arial" panose="020B0604020202020204" pitchFamily="34" charset="0"/>
         <a:buChar char="•"/>
         <a:defRPr sz="2000" kern="1200">
           <a:solidFill>
@@ -3792,7 +3789,7 @@
         <a:spcBef>
           <a:spcPct val="20000"/>
         </a:spcBef>
-        <a:buFont typeface="Arial" pitchFamily="34" charset="0"/>
+        <a:buFont typeface="Arial" panose="020B0604020202020204" pitchFamily="34" charset="0"/>
         <a:buChar char="•"/>
         <a:defRPr sz="2000" kern="1200">
           <a:solidFill>
@@ -3932,7 +3929,7 @@
         </p:nvSpPr>
         <p:spPr>
           <a:xfrm>
-            <a:off x="714348" y="928670"/>
+            <a:off x="786103" y="2220260"/>
             <a:ext cx="7772400" cy="1470025"/>
           </a:xfrm>
         </p:spPr>
@@ -3981,11 +3978,7 @@
           <a:noFill/>
         </p:spPr>
         <p:txBody>
-          <a:bodyPr vert="horz" wrap="square" lIns="91440" tIns="45720" rIns="91440" bIns="45720" numCol="1" anchor="t" anchorCtr="0" compatLnSpc="1">
-            <a:prstTxWarp prst="textNoShape">
-              <a:avLst/>
-            </a:prstTxWarp>
-          </a:bodyPr>
+          <a:bodyPr vert="horz" wrap="square" lIns="91440" tIns="45720" rIns="91440" bIns="45720" numCol="1" anchor="t" anchorCtr="0" compatLnSpc="1"/>
           <a:lstStyle/>
           <a:p>
             <a:endParaRPr lang="en-US"/>
@@ -4011,11 +4004,7 @@
           <a:noFill/>
         </p:spPr>
         <p:txBody>
-          <a:bodyPr vert="horz" wrap="square" lIns="91440" tIns="45720" rIns="91440" bIns="45720" numCol="1" anchor="t" anchorCtr="0" compatLnSpc="1">
-            <a:prstTxWarp prst="textNoShape">
-              <a:avLst/>
-            </a:prstTxWarp>
-          </a:bodyPr>
+          <a:bodyPr vert="horz" wrap="square" lIns="91440" tIns="45720" rIns="91440" bIns="45720" numCol="1" anchor="t" anchorCtr="0" compatLnSpc="1"/>
           <a:lstStyle/>
           <a:p>
             <a:endParaRPr lang="en-US"/>
@@ -4031,7 +4020,7 @@
           <p:nvPr/>
         </p:nvPicPr>
         <p:blipFill>
-          <a:blip r:embed="rId2"/>
+          <a:blip r:embed="rId1"/>
           <a:srcRect/>
           <a:stretch>
             <a:fillRect/>
@@ -4039,7 +4028,7 @@
         </p:blipFill>
         <p:spPr bwMode="auto">
           <a:xfrm>
-            <a:off x="3428992" y="2786058"/>
+            <a:off x="3572502" y="3934138"/>
             <a:ext cx="2143125" cy="2143125"/>
           </a:xfrm>
           <a:prstGeom prst="rect">
@@ -4048,6 +4037,63 @@
           <a:noFill/>
         </p:spPr>
       </p:pic>
+      <p:sp>
+        <p:nvSpPr>
+          <p:cNvPr id="3" name="Title 1"/>
+          <p:cNvSpPr>
+            <a:spLocks noGrp="1"/>
+          </p:cNvSpPr>
+          <p:nvPr/>
+        </p:nvSpPr>
+        <p:spPr>
+          <a:xfrm>
+            <a:off x="697838" y="696895"/>
+            <a:ext cx="7772400" cy="1470025"/>
+          </a:xfrm>
+          <a:prstGeom prst="rect">
+            <a:avLst/>
+          </a:prstGeom>
+        </p:spPr>
+        <p:txBody>
+          <a:bodyPr vert="horz" lIns="91440" tIns="45720" rIns="91440" bIns="45720" rtlCol="0" anchor="ctr">
+            <a:normAutofit/>
+          </a:bodyPr>
+          <a:lstStyle>
+            <a:lvl1pPr algn="ctr" defTabSz="914400" rtl="0" eaLnBrk="1" latinLnBrk="0" hangingPunct="1">
+              <a:spcBef>
+                <a:spcPct val="0"/>
+              </a:spcBef>
+              <a:buNone/>
+              <a:defRPr sz="4400" kern="1200">
+                <a:solidFill>
+                  <a:schemeClr val="tx1"/>
+                </a:solidFill>
+                <a:latin typeface="+mj-lt"/>
+                <a:ea typeface="+mj-ea"/>
+                <a:cs typeface="+mj-cs"/>
+              </a:defRPr>
+            </a:lvl1pPr>
+          </a:lstStyle>
+          <a:p>
+            <a:r>
+              <a:rPr lang="en-US" b="1" dirty="0"/>
+              <a:t>Unit 2: </a:t>
+            </a:r>
+            <a:r>
+              <a:rPr lang="en-US" altLang="en-GB" b="1" dirty="0"/>
+              <a:t>Control Flow and</a:t>
+            </a:r>
+            <a:endParaRPr lang="en-US" altLang="en-GB" b="1" dirty="0"/>
+          </a:p>
+          <a:p>
+            <a:r>
+              <a:rPr lang="en-US" altLang="en-GB" b="1" dirty="0"/>
+              <a:t>Functions</a:t>
+            </a:r>
+            <a:endParaRPr lang="en-US" altLang="en-GB" b="1" dirty="0"/>
+          </a:p>
+        </p:txBody>
+      </p:sp>
     </p:spTree>
   </p:cSld>
   <p:clrMapOvr>
@@ -4220,6 +4266,11 @@
               </a:rPr>
               <a:t>Python</a:t>
             </a:r>
+            <a:endParaRPr lang="en-US" sz="3600" b="1" dirty="0" smtClean="0">
+              <a:solidFill>
+                <a:srgbClr val="0A83C0"/>
+              </a:solidFill>
+            </a:endParaRPr>
           </a:p>
         </p:txBody>
       </p:sp>
@@ -4261,23 +4312,25 @@
           </a:p>
           <a:p>
             <a:pPr lvl="1">
-              <a:buFont typeface="Courier New" pitchFamily="49" charset="0"/>
+              <a:buFont typeface="Courier New" panose="02070309020205020404" pitchFamily="49" charset="0"/>
               <a:buChar char="o"/>
             </a:pPr>
             <a:r>
               <a:rPr lang="en-US" sz="2400" dirty="0" smtClean="0"/>
               <a:t>while loop</a:t>
             </a:r>
+            <a:endParaRPr lang="en-US" sz="2400" dirty="0" smtClean="0"/>
           </a:p>
           <a:p>
             <a:pPr lvl="1">
-              <a:buFont typeface="Courier New" pitchFamily="49" charset="0"/>
+              <a:buFont typeface="Courier New" panose="02070309020205020404" pitchFamily="49" charset="0"/>
               <a:buChar char="o"/>
             </a:pPr>
             <a:r>
               <a:rPr lang="en-US" sz="2400" dirty="0" smtClean="0"/>
               <a:t>for loop</a:t>
             </a:r>
+            <a:endParaRPr lang="en-US" sz="2400" dirty="0" smtClean="0"/>
           </a:p>
           <a:p>
             <a:pPr>
@@ -4309,12 +4362,18 @@
               </a:rPr>
               <a:t> </a:t>
             </a:r>
+            <a:endParaRPr lang="en-US" sz="2400" dirty="0" smtClean="0">
+              <a:solidFill>
+                <a:srgbClr val="0A83C0"/>
+              </a:solidFill>
+            </a:endParaRPr>
           </a:p>
           <a:p>
             <a:r>
               <a:rPr lang="en-US" sz="2400" dirty="0" smtClean="0"/>
               <a:t>With the while loop we can execute a set of statements as long as a condition is true. The while loop is mostly used in the case where the number of iterations is not known in advance.</a:t>
             </a:r>
+            <a:endParaRPr lang="en-US" sz="2400" dirty="0" smtClean="0"/>
           </a:p>
           <a:p>
             <a:pPr>
@@ -4342,6 +4401,7 @@
               <a:rPr lang="en-US" sz="2400" dirty="0" smtClean="0"/>
               <a:t> expression:  </a:t>
             </a:r>
+            <a:endParaRPr lang="en-US" sz="2400" dirty="0" smtClean="0"/>
           </a:p>
           <a:p>
             <a:pPr>
@@ -5529,6 +5589,7 @@
               <a:rPr lang="en-US" sz="2000" b="1" dirty="0" smtClean="0"/>
               <a:t>Cont..</a:t>
             </a:r>
+            <a:endParaRPr lang="en-US" sz="2000" b="1" dirty="0" smtClean="0"/>
           </a:p>
         </p:txBody>
       </p:sp>
@@ -5566,6 +5627,7 @@
               <a:rPr lang="en-US" sz="2400" dirty="0" smtClean="0"/>
               <a:t>Python enables us to use the while loop with the else block also. The else block is executed when the condition given in the while statement becomes false.</a:t>
             </a:r>
+            <a:endParaRPr lang="en-US" sz="2400" dirty="0" smtClean="0"/>
           </a:p>
         </p:txBody>
       </p:sp>
@@ -5654,7 +5716,7 @@
                 <a:solidFill>
                   <a:srgbClr val="000000"/>
                 </a:solidFill>
-                <a:latin typeface="Consolas"/>
+                <a:latin typeface="Consolas" panose="020B0609020204030204"/>
               </a:rPr>
               <a:t>i=</a:t>
             </a:r>
@@ -5663,7 +5725,7 @@
                 <a:solidFill>
                   <a:srgbClr val="800080"/>
                 </a:solidFill>
-                <a:latin typeface="Consolas"/>
+                <a:latin typeface="Consolas" panose="020B0609020204030204"/>
               </a:rPr>
               <a:t>1</a:t>
             </a:r>
@@ -5672,10 +5734,16 @@
                 <a:solidFill>
                   <a:srgbClr val="000000"/>
                 </a:solidFill>
-                <a:latin typeface="Consolas"/>
+                <a:latin typeface="Consolas" panose="020B0609020204030204"/>
               </a:rPr>
               <a:t>;   </a:t>
             </a:r>
+            <a:endParaRPr lang="nn-NO" sz="2000" dirty="0" smtClean="0">
+              <a:solidFill>
+                <a:srgbClr val="000000"/>
+              </a:solidFill>
+              <a:latin typeface="Consolas" panose="020B0609020204030204"/>
+            </a:endParaRPr>
           </a:p>
           <a:p>
             <a:r>
@@ -5683,7 +5751,7 @@
                 <a:solidFill>
                   <a:srgbClr val="000000"/>
                 </a:solidFill>
-                <a:latin typeface="Consolas"/>
+                <a:latin typeface="Consolas" panose="020B0609020204030204"/>
               </a:rPr>
               <a:t>while i&lt;=</a:t>
             </a:r>
@@ -5692,7 +5760,7 @@
                 <a:solidFill>
                   <a:srgbClr val="800080"/>
                 </a:solidFill>
-                <a:latin typeface="Consolas"/>
+                <a:latin typeface="Consolas" panose="020B0609020204030204"/>
               </a:rPr>
               <a:t>3</a:t>
             </a:r>
@@ -5701,16 +5769,19 @@
                 <a:solidFill>
                   <a:srgbClr val="000000"/>
                 </a:solidFill>
-                <a:latin typeface="Consolas"/>
+                <a:latin typeface="Consolas" panose="020B0609020204030204"/>
               </a:rPr>
               <a:t>:       </a:t>
             </a:r>
             <a:r>
               <a:rPr lang="nn-NO" sz="2000" dirty="0" smtClean="0">
-                <a:latin typeface="Consolas"/>
+                <a:latin typeface="Consolas" panose="020B0609020204030204"/>
               </a:rPr>
               <a:t> </a:t>
             </a:r>
+            <a:endParaRPr lang="nn-NO" sz="2000" dirty="0" smtClean="0">
+              <a:latin typeface="Consolas" panose="020B0609020204030204"/>
+            </a:endParaRPr>
           </a:p>
           <a:p>
             <a:r>
@@ -5718,7 +5789,7 @@
                 <a:solidFill>
                   <a:srgbClr val="0000FF"/>
                 </a:solidFill>
-                <a:latin typeface="Consolas"/>
+                <a:latin typeface="Consolas" panose="020B0609020204030204"/>
               </a:rPr>
               <a:t>	print</a:t>
             </a:r>
@@ -5727,16 +5798,19 @@
                 <a:solidFill>
                   <a:srgbClr val="000000"/>
                 </a:solidFill>
-                <a:latin typeface="Consolas"/>
+                <a:latin typeface="Consolas" panose="020B0609020204030204"/>
               </a:rPr>
               <a:t>(i);       </a:t>
             </a:r>
             <a:r>
               <a:rPr lang="nn-NO" sz="2000" dirty="0" smtClean="0">
-                <a:latin typeface="Consolas"/>
+                <a:latin typeface="Consolas" panose="020B0609020204030204"/>
               </a:rPr>
               <a:t> </a:t>
             </a:r>
+            <a:endParaRPr lang="nn-NO" sz="2000" dirty="0" smtClean="0">
+              <a:latin typeface="Consolas" panose="020B0609020204030204"/>
+            </a:endParaRPr>
           </a:p>
           <a:p>
             <a:r>
@@ -5744,7 +5818,7 @@
                 <a:solidFill>
                   <a:srgbClr val="000000"/>
                 </a:solidFill>
-                <a:latin typeface="Consolas"/>
+                <a:latin typeface="Consolas" panose="020B0609020204030204"/>
               </a:rPr>
               <a:t>	i=i+</a:t>
             </a:r>
@@ -5753,7 +5827,7 @@
                 <a:solidFill>
                   <a:srgbClr val="800080"/>
                 </a:solidFill>
-                <a:latin typeface="Consolas"/>
+                <a:latin typeface="Consolas" panose="020B0609020204030204"/>
               </a:rPr>
               <a:t>1</a:t>
             </a:r>
@@ -5762,7 +5836,7 @@
                 <a:solidFill>
                   <a:srgbClr val="000000"/>
                 </a:solidFill>
-                <a:latin typeface="Consolas"/>
+                <a:latin typeface="Consolas" panose="020B0609020204030204"/>
               </a:rPr>
               <a:t>; </a:t>
             </a:r>
@@ -5823,24 +5897,28 @@
               <a:rPr lang="en-US" sz="2200" dirty="0" smtClean="0"/>
               <a:t> whiledemo.py</a:t>
             </a:r>
+            <a:endParaRPr lang="en-US" sz="2200" dirty="0" smtClean="0"/>
           </a:p>
           <a:p>
             <a:r>
               <a:rPr lang="en-US" sz="2200" dirty="0" smtClean="0"/>
               <a:t>1</a:t>
             </a:r>
+            <a:endParaRPr lang="en-US" sz="2200" dirty="0" smtClean="0"/>
           </a:p>
           <a:p>
             <a:r>
               <a:rPr lang="en-US" sz="2200" dirty="0" smtClean="0"/>
               <a:t>2</a:t>
             </a:r>
+            <a:endParaRPr lang="en-US" sz="2200" dirty="0" smtClean="0"/>
           </a:p>
           <a:p>
             <a:r>
               <a:rPr lang="en-US" sz="2200" dirty="0" smtClean="0"/>
               <a:t>3</a:t>
             </a:r>
+            <a:endParaRPr lang="en-US" sz="2200" dirty="0" smtClean="0"/>
           </a:p>
         </p:txBody>
       </p:sp>
@@ -5899,7 +5977,7 @@
                 <a:solidFill>
                   <a:srgbClr val="000000"/>
                 </a:solidFill>
-                <a:latin typeface="Consolas"/>
+                <a:latin typeface="Consolas" panose="020B0609020204030204"/>
               </a:rPr>
               <a:t>i=</a:t>
             </a:r>
@@ -5908,7 +5986,7 @@
                 <a:solidFill>
                   <a:srgbClr val="800080"/>
                 </a:solidFill>
-                <a:latin typeface="Consolas"/>
+                <a:latin typeface="Consolas" panose="020B0609020204030204"/>
               </a:rPr>
               <a:t>1</a:t>
             </a:r>
@@ -5917,10 +5995,16 @@
                 <a:solidFill>
                   <a:srgbClr val="000000"/>
                 </a:solidFill>
-                <a:latin typeface="Consolas"/>
+                <a:latin typeface="Consolas" panose="020B0609020204030204"/>
               </a:rPr>
               <a:t>;   </a:t>
             </a:r>
+            <a:endParaRPr lang="nn-NO" sz="2000" dirty="0" smtClean="0">
+              <a:solidFill>
+                <a:srgbClr val="000000"/>
+              </a:solidFill>
+              <a:latin typeface="Consolas" panose="020B0609020204030204"/>
+            </a:endParaRPr>
           </a:p>
           <a:p>
             <a:r>
@@ -5928,7 +6012,7 @@
                 <a:solidFill>
                   <a:srgbClr val="000000"/>
                 </a:solidFill>
-                <a:latin typeface="Consolas"/>
+                <a:latin typeface="Consolas" panose="020B0609020204030204"/>
               </a:rPr>
               <a:t>while i&lt;=</a:t>
             </a:r>
@@ -5937,7 +6021,7 @@
                 <a:solidFill>
                   <a:srgbClr val="800080"/>
                 </a:solidFill>
-                <a:latin typeface="Consolas"/>
+                <a:latin typeface="Consolas" panose="020B0609020204030204"/>
               </a:rPr>
               <a:t>3</a:t>
             </a:r>
@@ -5946,16 +6030,19 @@
                 <a:solidFill>
                   <a:srgbClr val="000000"/>
                 </a:solidFill>
-                <a:latin typeface="Consolas"/>
+                <a:latin typeface="Consolas" panose="020B0609020204030204"/>
               </a:rPr>
               <a:t>:       </a:t>
             </a:r>
             <a:r>
               <a:rPr lang="nn-NO" sz="2000" dirty="0" smtClean="0">
-                <a:latin typeface="Consolas"/>
+                <a:latin typeface="Consolas" panose="020B0609020204030204"/>
               </a:rPr>
               <a:t> </a:t>
             </a:r>
+            <a:endParaRPr lang="nn-NO" sz="2000" dirty="0" smtClean="0">
+              <a:latin typeface="Consolas" panose="020B0609020204030204"/>
+            </a:endParaRPr>
           </a:p>
           <a:p>
             <a:r>
@@ -5963,7 +6050,7 @@
                 <a:solidFill>
                   <a:srgbClr val="0000FF"/>
                 </a:solidFill>
-                <a:latin typeface="Consolas"/>
+                <a:latin typeface="Consolas" panose="020B0609020204030204"/>
               </a:rPr>
               <a:t>	print</a:t>
             </a:r>
@@ -5972,16 +6059,19 @@
                 <a:solidFill>
                   <a:srgbClr val="000000"/>
                 </a:solidFill>
-                <a:latin typeface="Consolas"/>
+                <a:latin typeface="Consolas" panose="020B0609020204030204"/>
               </a:rPr>
               <a:t>(i);       </a:t>
             </a:r>
             <a:r>
               <a:rPr lang="nn-NO" sz="2000" dirty="0" smtClean="0">
-                <a:latin typeface="Consolas"/>
+                <a:latin typeface="Consolas" panose="020B0609020204030204"/>
               </a:rPr>
               <a:t> </a:t>
             </a:r>
+            <a:endParaRPr lang="nn-NO" sz="2000" dirty="0" smtClean="0">
+              <a:latin typeface="Consolas" panose="020B0609020204030204"/>
+            </a:endParaRPr>
           </a:p>
           <a:p>
             <a:r>
@@ -5989,7 +6079,7 @@
                 <a:solidFill>
                   <a:srgbClr val="000000"/>
                 </a:solidFill>
-                <a:latin typeface="Consolas"/>
+                <a:latin typeface="Consolas" panose="020B0609020204030204"/>
               </a:rPr>
               <a:t>	i=i+</a:t>
             </a:r>
@@ -5998,7 +6088,7 @@
                 <a:solidFill>
                   <a:srgbClr val="800080"/>
                 </a:solidFill>
-                <a:latin typeface="Consolas"/>
+                <a:latin typeface="Consolas" panose="020B0609020204030204"/>
               </a:rPr>
               <a:t>1</a:t>
             </a:r>
@@ -6007,7 +6097,7 @@
                 <a:solidFill>
                   <a:srgbClr val="000000"/>
                 </a:solidFill>
-                <a:latin typeface="Consolas"/>
+                <a:latin typeface="Consolas" panose="020B0609020204030204"/>
               </a:rPr>
               <a:t>; </a:t>
             </a:r>
@@ -6016,16 +6106,19 @@
                 <a:solidFill>
                   <a:srgbClr val="000000"/>
                 </a:solidFill>
-                <a:latin typeface="Consolas"/>
+                <a:latin typeface="Consolas" panose="020B0609020204030204"/>
               </a:rPr>
               <a:t>  </a:t>
             </a:r>
             <a:r>
               <a:rPr lang="en-US" sz="2000" dirty="0" smtClean="0">
-                <a:latin typeface="Consolas"/>
+                <a:latin typeface="Consolas" panose="020B0609020204030204"/>
               </a:rPr>
               <a:t> </a:t>
             </a:r>
+            <a:endParaRPr lang="en-US" sz="2000" dirty="0" smtClean="0">
+              <a:latin typeface="Consolas" panose="020B0609020204030204"/>
+            </a:endParaRPr>
           </a:p>
           <a:p>
             <a:r>
@@ -6033,7 +6126,7 @@
                 <a:solidFill>
                   <a:srgbClr val="0000FF"/>
                 </a:solidFill>
-                <a:latin typeface="Consolas"/>
+                <a:latin typeface="Consolas" panose="020B0609020204030204"/>
               </a:rPr>
               <a:t>else</a:t>
             </a:r>
@@ -6042,16 +6135,19 @@
                 <a:solidFill>
                   <a:srgbClr val="000000"/>
                 </a:solidFill>
-                <a:latin typeface="Consolas"/>
+                <a:latin typeface="Consolas" panose="020B0609020204030204"/>
               </a:rPr>
               <a:t>:</a:t>
             </a:r>
             <a:r>
               <a:rPr lang="en-US" sz="2000" dirty="0" smtClean="0">
-                <a:latin typeface="Consolas"/>
+                <a:latin typeface="Consolas" panose="020B0609020204030204"/>
               </a:rPr>
               <a:t> </a:t>
             </a:r>
+            <a:endParaRPr lang="en-US" sz="2000" dirty="0" smtClean="0">
+              <a:latin typeface="Consolas" panose="020B0609020204030204"/>
+            </a:endParaRPr>
           </a:p>
           <a:p>
             <a:r>
@@ -6059,7 +6155,7 @@
                 <a:solidFill>
                   <a:srgbClr val="0000FF"/>
                 </a:solidFill>
-                <a:latin typeface="Consolas"/>
+                <a:latin typeface="Consolas" panose="020B0609020204030204"/>
               </a:rPr>
               <a:t>	print</a:t>
             </a:r>
@@ -6068,7 +6164,7 @@
                 <a:solidFill>
                   <a:srgbClr val="000000"/>
                 </a:solidFill>
-                <a:latin typeface="Consolas"/>
+                <a:latin typeface="Consolas" panose="020B0609020204030204"/>
               </a:rPr>
               <a:t>(</a:t>
             </a:r>
@@ -6077,7 +6173,7 @@
                 <a:solidFill>
                   <a:srgbClr val="FF00FF"/>
                 </a:solidFill>
-                <a:latin typeface="Consolas"/>
+                <a:latin typeface="Consolas" panose="020B0609020204030204"/>
               </a:rPr>
               <a:t>"while loop terminated"</a:t>
             </a:r>
@@ -6086,13 +6182,13 @@
                 <a:solidFill>
                   <a:srgbClr val="000000"/>
                 </a:solidFill>
-                <a:latin typeface="Consolas"/>
+                <a:latin typeface="Consolas" panose="020B0609020204030204"/>
               </a:rPr>
               <a:t>)</a:t>
             </a:r>
             <a:r>
               <a:rPr lang="en-US" sz="2000" dirty="0" smtClean="0">
-                <a:latin typeface="Consolas"/>
+                <a:latin typeface="Consolas" panose="020B0609020204030204"/>
               </a:rPr>
               <a:t> </a:t>
             </a:r>
@@ -6153,30 +6249,35 @@
               <a:rPr lang="en-US" sz="2200" dirty="0" smtClean="0"/>
               <a:t> wedemo.py</a:t>
             </a:r>
+            <a:endParaRPr lang="en-US" sz="2200" dirty="0" smtClean="0"/>
           </a:p>
           <a:p>
             <a:r>
               <a:rPr lang="en-US" sz="2200" dirty="0" smtClean="0"/>
               <a:t>1</a:t>
             </a:r>
+            <a:endParaRPr lang="en-US" sz="2200" dirty="0" smtClean="0"/>
           </a:p>
           <a:p>
             <a:r>
               <a:rPr lang="en-US" sz="2200" dirty="0" smtClean="0"/>
               <a:t>2</a:t>
             </a:r>
+            <a:endParaRPr lang="en-US" sz="2200" dirty="0" smtClean="0"/>
           </a:p>
           <a:p>
             <a:r>
               <a:rPr lang="en-US" sz="2200" dirty="0" smtClean="0"/>
               <a:t>3</a:t>
             </a:r>
+            <a:endParaRPr lang="en-US" sz="2200" dirty="0" smtClean="0"/>
           </a:p>
           <a:p>
             <a:r>
               <a:rPr lang="en-US" sz="2200" dirty="0" smtClean="0"/>
               <a:t>while loop terminated</a:t>
             </a:r>
+            <a:endParaRPr lang="en-US" sz="2200" dirty="0" smtClean="0"/>
           </a:p>
           <a:p>
             <a:endParaRPr lang="en-US" sz="1400" dirty="0" smtClean="0"/>
@@ -6924,6 +7025,7 @@
               <a:rPr lang="en-US" sz="2000" b="1" dirty="0" smtClean="0"/>
               <a:t>Cont..</a:t>
             </a:r>
+            <a:endParaRPr lang="en-US" sz="2000" b="1" dirty="0" smtClean="0"/>
           </a:p>
         </p:txBody>
       </p:sp>
@@ -6968,6 +7070,11 @@
               </a:rPr>
               <a:t> </a:t>
             </a:r>
+            <a:endParaRPr lang="en-US" sz="2800" dirty="0" smtClean="0">
+              <a:solidFill>
+                <a:srgbClr val="0A83C0"/>
+              </a:solidFill>
+            </a:endParaRPr>
           </a:p>
           <a:p>
             <a:pPr algn="just"/>
@@ -6975,6 +7082,7 @@
               <a:rPr lang="en-US" sz="2600" dirty="0" smtClean="0"/>
               <a:t>The for loop in Python is used to iterate the statements or a part of the program several times. It is frequently used to traverse the data structures like list, tuple, or dictionary.</a:t>
             </a:r>
+            <a:endParaRPr lang="en-US" sz="2600" dirty="0" smtClean="0"/>
           </a:p>
           <a:p>
             <a:pPr algn="just">
@@ -7012,6 +7120,7 @@
               <a:rPr lang="en-US" sz="2600" dirty="0" smtClean="0"/>
               <a:t> sequence:  </a:t>
             </a:r>
+            <a:endParaRPr lang="en-US" sz="2600" dirty="0" smtClean="0"/>
           </a:p>
           <a:p>
             <a:pPr algn="just">
@@ -7021,6 +7130,7 @@
               <a:rPr lang="en-US" sz="2600" dirty="0" smtClean="0"/>
               <a:t>	   	statement(s)</a:t>
             </a:r>
+            <a:endParaRPr lang="en-US" sz="2600" dirty="0" smtClean="0"/>
           </a:p>
           <a:p>
             <a:pPr lvl="0">
@@ -7115,7 +7225,7 @@
                 <a:solidFill>
                   <a:srgbClr val="000000"/>
                 </a:solidFill>
-                <a:latin typeface="Consolas"/>
+                <a:latin typeface="Consolas" panose="020B0609020204030204"/>
               </a:rPr>
               <a:t>i</a:t>
             </a:r>
@@ -7124,7 +7234,7 @@
                 <a:solidFill>
                   <a:srgbClr val="000000"/>
                 </a:solidFill>
-                <a:latin typeface="Consolas"/>
+                <a:latin typeface="Consolas" panose="020B0609020204030204"/>
               </a:rPr>
               <a:t>=</a:t>
             </a:r>
@@ -7133,10 +7243,16 @@
                 <a:solidFill>
                   <a:srgbClr val="800080"/>
                 </a:solidFill>
-                <a:latin typeface="Consolas"/>
+                <a:latin typeface="Consolas" panose="020B0609020204030204"/>
               </a:rPr>
               <a:t>1 </a:t>
             </a:r>
+            <a:endParaRPr lang="en-US" sz="2000" dirty="0" smtClean="0">
+              <a:solidFill>
+                <a:srgbClr val="800080"/>
+              </a:solidFill>
+              <a:latin typeface="Consolas" panose="020B0609020204030204"/>
+            </a:endParaRPr>
           </a:p>
           <a:p>
             <a:r>
@@ -7144,7 +7260,7 @@
                 <a:solidFill>
                   <a:srgbClr val="000000"/>
                 </a:solidFill>
-                <a:latin typeface="Consolas"/>
+                <a:latin typeface="Consolas" panose="020B0609020204030204"/>
               </a:rPr>
               <a:t>n=</a:t>
             </a:r>
@@ -7153,7 +7269,7 @@
                 <a:solidFill>
                   <a:srgbClr val="008080"/>
                 </a:solidFill>
-                <a:latin typeface="Consolas"/>
+                <a:latin typeface="Consolas" panose="020B0609020204030204"/>
               </a:rPr>
               <a:t>int</a:t>
             </a:r>
@@ -7162,7 +7278,7 @@
                 <a:solidFill>
                   <a:srgbClr val="000000"/>
                 </a:solidFill>
-                <a:latin typeface="Consolas"/>
+                <a:latin typeface="Consolas" panose="020B0609020204030204"/>
               </a:rPr>
               <a:t>(</a:t>
             </a:r>
@@ -7171,7 +7287,7 @@
                 <a:solidFill>
                   <a:srgbClr val="008080"/>
                 </a:solidFill>
-                <a:latin typeface="Consolas"/>
+                <a:latin typeface="Consolas" panose="020B0609020204030204"/>
               </a:rPr>
               <a:t>input</a:t>
             </a:r>
@@ -7180,7 +7296,7 @@
                 <a:solidFill>
                   <a:srgbClr val="000000"/>
                 </a:solidFill>
-                <a:latin typeface="Consolas"/>
+                <a:latin typeface="Consolas" panose="020B0609020204030204"/>
               </a:rPr>
               <a:t>(</a:t>
             </a:r>
@@ -7189,7 +7305,7 @@
                 <a:solidFill>
                   <a:srgbClr val="FF00FF"/>
                 </a:solidFill>
-                <a:latin typeface="Consolas"/>
+                <a:latin typeface="Consolas" panose="020B0609020204030204"/>
               </a:rPr>
               <a:t>"Enter n value : "</a:t>
             </a:r>
@@ -7198,10 +7314,16 @@
                 <a:solidFill>
                   <a:srgbClr val="000000"/>
                 </a:solidFill>
-                <a:latin typeface="Consolas"/>
+                <a:latin typeface="Consolas" panose="020B0609020204030204"/>
               </a:rPr>
               <a:t>)) </a:t>
             </a:r>
+            <a:endParaRPr lang="en-US" sz="2000" dirty="0" smtClean="0">
+              <a:solidFill>
+                <a:srgbClr val="000000"/>
+              </a:solidFill>
+              <a:latin typeface="Consolas" panose="020B0609020204030204"/>
+            </a:endParaRPr>
           </a:p>
           <a:p>
             <a:r>
@@ -7209,7 +7331,7 @@
                 <a:solidFill>
                   <a:srgbClr val="0000FF"/>
                 </a:solidFill>
-                <a:latin typeface="Consolas"/>
+                <a:latin typeface="Consolas" panose="020B0609020204030204"/>
               </a:rPr>
               <a:t>for </a:t>
             </a:r>
@@ -7218,7 +7340,7 @@
                 <a:solidFill>
                   <a:srgbClr val="000000"/>
                 </a:solidFill>
-                <a:latin typeface="Consolas"/>
+                <a:latin typeface="Consolas" panose="020B0609020204030204"/>
               </a:rPr>
               <a:t>i</a:t>
             </a:r>
@@ -7227,7 +7349,7 @@
                 <a:solidFill>
                   <a:srgbClr val="000000"/>
                 </a:solidFill>
-                <a:latin typeface="Consolas"/>
+                <a:latin typeface="Consolas" panose="020B0609020204030204"/>
               </a:rPr>
               <a:t> </a:t>
             </a:r>
@@ -7236,7 +7358,7 @@
                 <a:solidFill>
                   <a:srgbClr val="0000FF"/>
                 </a:solidFill>
-                <a:latin typeface="Consolas"/>
+                <a:latin typeface="Consolas" panose="020B0609020204030204"/>
               </a:rPr>
               <a:t>in </a:t>
             </a:r>
@@ -7245,7 +7367,7 @@
                 <a:solidFill>
                   <a:srgbClr val="008080"/>
                 </a:solidFill>
-                <a:latin typeface="Consolas"/>
+                <a:latin typeface="Consolas" panose="020B0609020204030204"/>
               </a:rPr>
               <a:t>range</a:t>
             </a:r>
@@ -7254,7 +7376,7 @@
                 <a:solidFill>
                   <a:srgbClr val="000000"/>
                 </a:solidFill>
-                <a:latin typeface="Consolas"/>
+                <a:latin typeface="Consolas" panose="020B0609020204030204"/>
               </a:rPr>
               <a:t>(i,n+</a:t>
             </a:r>
@@ -7263,7 +7385,7 @@
                 <a:solidFill>
                   <a:srgbClr val="800080"/>
                 </a:solidFill>
-                <a:latin typeface="Consolas"/>
+                <a:latin typeface="Consolas" panose="020B0609020204030204"/>
               </a:rPr>
               <a:t>1</a:t>
             </a:r>
@@ -7272,10 +7394,16 @@
                 <a:solidFill>
                   <a:srgbClr val="000000"/>
                 </a:solidFill>
-                <a:latin typeface="Consolas"/>
+                <a:latin typeface="Consolas" panose="020B0609020204030204"/>
               </a:rPr>
               <a:t>): </a:t>
             </a:r>
+            <a:endParaRPr lang="en-US" sz="2000" dirty="0" smtClean="0">
+              <a:solidFill>
+                <a:srgbClr val="000000"/>
+              </a:solidFill>
+              <a:latin typeface="Consolas" panose="020B0609020204030204"/>
+            </a:endParaRPr>
           </a:p>
           <a:p>
             <a:r>
@@ -7283,7 +7411,7 @@
                 <a:solidFill>
                   <a:srgbClr val="000000"/>
                 </a:solidFill>
-                <a:latin typeface="Consolas"/>
+                <a:latin typeface="Consolas" panose="020B0609020204030204"/>
               </a:rPr>
               <a:t>	</a:t>
             </a:r>
@@ -7292,7 +7420,7 @@
                 <a:solidFill>
                   <a:srgbClr val="0000FF"/>
                 </a:solidFill>
-                <a:latin typeface="Consolas"/>
+                <a:latin typeface="Consolas" panose="020B0609020204030204"/>
               </a:rPr>
               <a:t>print</a:t>
             </a:r>
@@ -7301,7 +7429,7 @@
                 <a:solidFill>
                   <a:srgbClr val="000000"/>
                 </a:solidFill>
-                <a:latin typeface="Consolas"/>
+                <a:latin typeface="Consolas" panose="020B0609020204030204"/>
               </a:rPr>
               <a:t>(</a:t>
             </a:r>
@@ -7310,7 +7438,7 @@
                 <a:solidFill>
                   <a:srgbClr val="000000"/>
                 </a:solidFill>
-                <a:latin typeface="Consolas"/>
+                <a:latin typeface="Consolas" panose="020B0609020204030204"/>
               </a:rPr>
               <a:t>i,</a:t>
             </a:r>
@@ -7319,7 +7447,7 @@
                 <a:solidFill>
                   <a:srgbClr val="008080"/>
                 </a:solidFill>
-                <a:latin typeface="Consolas"/>
+                <a:latin typeface="Consolas" panose="020B0609020204030204"/>
               </a:rPr>
               <a:t>end</a:t>
             </a:r>
@@ -7328,7 +7456,7 @@
                 <a:solidFill>
                   <a:srgbClr val="008080"/>
                 </a:solidFill>
-                <a:latin typeface="Consolas"/>
+                <a:latin typeface="Consolas" panose="020B0609020204030204"/>
               </a:rPr>
               <a:t> </a:t>
             </a:r>
@@ -7337,7 +7465,7 @@
                 <a:solidFill>
                   <a:srgbClr val="000000"/>
                 </a:solidFill>
-                <a:latin typeface="Consolas"/>
+                <a:latin typeface="Consolas" panose="020B0609020204030204"/>
               </a:rPr>
               <a:t>= </a:t>
             </a:r>
@@ -7346,7 +7474,7 @@
                 <a:solidFill>
                   <a:srgbClr val="FF00FF"/>
                 </a:solidFill>
-                <a:latin typeface="Consolas"/>
+                <a:latin typeface="Consolas" panose="020B0609020204030204"/>
               </a:rPr>
               <a:t>' '</a:t>
             </a:r>
@@ -7355,13 +7483,13 @@
                 <a:solidFill>
                   <a:srgbClr val="000000"/>
                 </a:solidFill>
-                <a:latin typeface="Consolas"/>
+                <a:latin typeface="Consolas" panose="020B0609020204030204"/>
               </a:rPr>
               <a:t>)</a:t>
             </a:r>
             <a:r>
               <a:rPr lang="en-US" sz="2000" dirty="0" smtClean="0">
-                <a:latin typeface="Consolas"/>
+                <a:latin typeface="Consolas" panose="020B0609020204030204"/>
               </a:rPr>
               <a:t> </a:t>
             </a:r>
@@ -7422,12 +7550,14 @@
               <a:rPr lang="en-US" sz="2200" dirty="0" smtClean="0"/>
               <a:t> fordemo.py</a:t>
             </a:r>
+            <a:endParaRPr lang="en-US" sz="2200" dirty="0" smtClean="0"/>
           </a:p>
           <a:p>
             <a:r>
               <a:rPr lang="en-US" sz="2400" dirty="0" smtClean="0"/>
               <a:t>Enter n value: 5</a:t>
             </a:r>
+            <a:endParaRPr lang="en-US" sz="2400" dirty="0" smtClean="0"/>
           </a:p>
           <a:p>
             <a:r>
@@ -8327,6 +8457,7 @@
               <a:rPr lang="en-US" sz="2000" b="1" dirty="0" smtClean="0"/>
               <a:t>Cont..</a:t>
             </a:r>
+            <a:endParaRPr lang="en-US" sz="2000" b="1" dirty="0" smtClean="0"/>
           </a:p>
         </p:txBody>
       </p:sp>
@@ -8367,6 +8498,7 @@
               <a:rPr lang="en-US" sz="2400" dirty="0" smtClean="0"/>
               <a:t>Python allows us to use the else statement with the for loop which can be executed only when all the iterations are exhausted. </a:t>
             </a:r>
+            <a:endParaRPr lang="en-US" sz="2400" dirty="0" smtClean="0"/>
           </a:p>
           <a:p>
             <a:pPr algn="just"/>
@@ -8374,6 +8506,7 @@
               <a:rPr lang="en-US" sz="2400" dirty="0" smtClean="0"/>
               <a:t>Here, we must notice that if the loop contains any of the break statement then the else statement will not be executed.</a:t>
             </a:r>
+            <a:endParaRPr lang="en-US" sz="2400" dirty="0" smtClean="0"/>
           </a:p>
           <a:p>
             <a:pPr lvl="0">
@@ -8468,7 +8601,7 @@
                 <a:solidFill>
                   <a:srgbClr val="000000"/>
                 </a:solidFill>
-                <a:latin typeface="Consolas"/>
+                <a:latin typeface="Consolas" panose="020B0609020204030204"/>
               </a:rPr>
               <a:t>for </a:t>
             </a:r>
@@ -8477,7 +8610,7 @@
                 <a:solidFill>
                   <a:srgbClr val="000000"/>
                 </a:solidFill>
-                <a:latin typeface="Consolas"/>
+                <a:latin typeface="Consolas" panose="020B0609020204030204"/>
               </a:rPr>
               <a:t>i</a:t>
             </a:r>
@@ -8486,7 +8619,7 @@
                 <a:solidFill>
                   <a:srgbClr val="000000"/>
                 </a:solidFill>
-                <a:latin typeface="Consolas"/>
+                <a:latin typeface="Consolas" panose="020B0609020204030204"/>
               </a:rPr>
               <a:t> in range(</a:t>
             </a:r>
@@ -8495,7 +8628,7 @@
                 <a:solidFill>
                   <a:srgbClr val="800080"/>
                 </a:solidFill>
-                <a:latin typeface="Consolas"/>
+                <a:latin typeface="Consolas" panose="020B0609020204030204"/>
               </a:rPr>
               <a:t>1</a:t>
             </a:r>
@@ -8504,7 +8637,7 @@
                 <a:solidFill>
                   <a:srgbClr val="000000"/>
                 </a:solidFill>
-                <a:latin typeface="Consolas"/>
+                <a:latin typeface="Consolas" panose="020B0609020204030204"/>
               </a:rPr>
               <a:t>,</a:t>
             </a:r>
@@ -8513,7 +8646,7 @@
                 <a:solidFill>
                   <a:srgbClr val="800080"/>
                 </a:solidFill>
-                <a:latin typeface="Consolas"/>
+                <a:latin typeface="Consolas" panose="020B0609020204030204"/>
               </a:rPr>
               <a:t>5</a:t>
             </a:r>
@@ -8522,16 +8655,19 @@
                 <a:solidFill>
                   <a:srgbClr val="000000"/>
                 </a:solidFill>
-                <a:latin typeface="Consolas"/>
+                <a:latin typeface="Consolas" panose="020B0609020204030204"/>
               </a:rPr>
               <a:t>):       </a:t>
             </a:r>
             <a:r>
               <a:rPr lang="en-US" sz="2000" dirty="0" smtClean="0">
-                <a:latin typeface="Consolas"/>
+                <a:latin typeface="Consolas" panose="020B0609020204030204"/>
               </a:rPr>
               <a:t> </a:t>
             </a:r>
+            <a:endParaRPr lang="en-US" sz="2000" dirty="0" smtClean="0">
+              <a:latin typeface="Consolas" panose="020B0609020204030204"/>
+            </a:endParaRPr>
           </a:p>
           <a:p>
             <a:r>
@@ -8539,7 +8675,7 @@
                 <a:solidFill>
                   <a:srgbClr val="0000FF"/>
                 </a:solidFill>
-                <a:latin typeface="Consolas"/>
+                <a:latin typeface="Consolas" panose="020B0609020204030204"/>
               </a:rPr>
               <a:t>	print</a:t>
             </a:r>
@@ -8548,7 +8684,7 @@
                 <a:solidFill>
                   <a:srgbClr val="000000"/>
                 </a:solidFill>
-                <a:latin typeface="Consolas"/>
+                <a:latin typeface="Consolas" panose="020B0609020204030204"/>
               </a:rPr>
               <a:t>(</a:t>
             </a:r>
@@ -8557,7 +8693,7 @@
                 <a:solidFill>
                   <a:srgbClr val="000000"/>
                 </a:solidFill>
-                <a:latin typeface="Consolas"/>
+                <a:latin typeface="Consolas" panose="020B0609020204030204"/>
               </a:rPr>
               <a:t>i,</a:t>
             </a:r>
@@ -8566,7 +8702,7 @@
                 <a:solidFill>
                   <a:srgbClr val="008080"/>
                 </a:solidFill>
-                <a:latin typeface="Consolas"/>
+                <a:latin typeface="Consolas" panose="020B0609020204030204"/>
               </a:rPr>
               <a:t>end</a:t>
             </a:r>
@@ -8575,7 +8711,7 @@
                 <a:solidFill>
                   <a:srgbClr val="000000"/>
                 </a:solidFill>
-                <a:latin typeface="Consolas"/>
+                <a:latin typeface="Consolas" panose="020B0609020204030204"/>
               </a:rPr>
               <a:t>=</a:t>
             </a:r>
@@ -8584,7 +8720,7 @@
                 <a:solidFill>
                   <a:srgbClr val="FF00FF"/>
                 </a:solidFill>
-                <a:latin typeface="Consolas"/>
+                <a:latin typeface="Consolas" panose="020B0609020204030204"/>
               </a:rPr>
               <a:t>' '</a:t>
             </a:r>
@@ -8593,13 +8729,13 @@
                 <a:solidFill>
                   <a:srgbClr val="000000"/>
                 </a:solidFill>
-                <a:latin typeface="Consolas"/>
+                <a:latin typeface="Consolas" panose="020B0609020204030204"/>
               </a:rPr>
               <a:t>)</a:t>
             </a:r>
             <a:r>
               <a:rPr lang="en-US" sz="2000" dirty="0" smtClean="0">
-                <a:latin typeface="Consolas"/>
+                <a:latin typeface="Consolas" panose="020B0609020204030204"/>
               </a:rPr>
               <a:t> </a:t>
             </a:r>
@@ -8608,16 +8744,19 @@
                 <a:solidFill>
                   <a:srgbClr val="000000"/>
                 </a:solidFill>
-                <a:latin typeface="Consolas"/>
+                <a:latin typeface="Consolas" panose="020B0609020204030204"/>
               </a:rPr>
               <a:t>  </a:t>
             </a:r>
             <a:r>
               <a:rPr lang="en-US" sz="2000" dirty="0" smtClean="0">
-                <a:latin typeface="Consolas"/>
+                <a:latin typeface="Consolas" panose="020B0609020204030204"/>
               </a:rPr>
               <a:t> </a:t>
             </a:r>
+            <a:endParaRPr lang="en-US" sz="2000" dirty="0" smtClean="0">
+              <a:latin typeface="Consolas" panose="020B0609020204030204"/>
+            </a:endParaRPr>
           </a:p>
           <a:p>
             <a:r>
@@ -8625,7 +8764,7 @@
                 <a:solidFill>
                   <a:srgbClr val="0000FF"/>
                 </a:solidFill>
-                <a:latin typeface="Consolas"/>
+                <a:latin typeface="Consolas" panose="020B0609020204030204"/>
               </a:rPr>
               <a:t>else</a:t>
             </a:r>
@@ -8634,13 +8773,13 @@
                 <a:solidFill>
                   <a:srgbClr val="000000"/>
                 </a:solidFill>
-                <a:latin typeface="Consolas"/>
+                <a:latin typeface="Consolas" panose="020B0609020204030204"/>
               </a:rPr>
               <a:t>:</a:t>
             </a:r>
             <a:r>
               <a:rPr lang="en-US" sz="2000" dirty="0" smtClean="0">
-                <a:latin typeface="Consolas"/>
+                <a:latin typeface="Consolas" panose="020B0609020204030204"/>
               </a:rPr>
               <a:t>    	</a:t>
             </a:r>
@@ -8649,7 +8788,7 @@
                 <a:solidFill>
                   <a:srgbClr val="0000FF"/>
                 </a:solidFill>
-                <a:latin typeface="Consolas"/>
+                <a:latin typeface="Consolas" panose="020B0609020204030204"/>
               </a:rPr>
               <a:t>print</a:t>
             </a:r>
@@ -8658,7 +8797,7 @@
                 <a:solidFill>
                   <a:srgbClr val="000000"/>
                 </a:solidFill>
-                <a:latin typeface="Consolas"/>
+                <a:latin typeface="Consolas" panose="020B0609020204030204"/>
               </a:rPr>
               <a:t>(</a:t>
             </a:r>
@@ -8667,7 +8806,7 @@
                 <a:solidFill>
                   <a:srgbClr val="FF00FF"/>
                 </a:solidFill>
-                <a:latin typeface="Consolas"/>
+                <a:latin typeface="Consolas" panose="020B0609020204030204"/>
               </a:rPr>
               <a:t>"for loop completely exhausted"</a:t>
             </a:r>
@@ -8676,13 +8815,13 @@
                 <a:solidFill>
                   <a:srgbClr val="000000"/>
                 </a:solidFill>
-                <a:latin typeface="Consolas"/>
+                <a:latin typeface="Consolas" panose="020B0609020204030204"/>
               </a:rPr>
               <a:t>);</a:t>
             </a:r>
             <a:r>
               <a:rPr lang="en-US" sz="2000" dirty="0" smtClean="0">
-                <a:latin typeface="Consolas"/>
+                <a:latin typeface="Consolas" panose="020B0609020204030204"/>
               </a:rPr>
               <a:t> </a:t>
             </a:r>
@@ -8743,12 +8882,14 @@
               <a:rPr lang="en-US" sz="2200" dirty="0" smtClean="0"/>
               <a:t> fedemo.py</a:t>
             </a:r>
+            <a:endParaRPr lang="en-US" sz="2200" dirty="0" smtClean="0"/>
           </a:p>
           <a:p>
             <a:r>
               <a:rPr lang="en-US" sz="2200" dirty="0" smtClean="0"/>
               <a:t>1 2 3 4</a:t>
             </a:r>
+            <a:endParaRPr lang="en-US" sz="2200" dirty="0" smtClean="0"/>
           </a:p>
           <a:p>
             <a:r>
@@ -9501,6 +9642,11 @@
               </a:rPr>
               <a:t>Python</a:t>
             </a:r>
+            <a:endParaRPr lang="en-US" sz="3600" b="1" dirty="0" smtClean="0">
+              <a:solidFill>
+                <a:srgbClr val="0A83C0"/>
+              </a:solidFill>
+            </a:endParaRPr>
           </a:p>
         </p:txBody>
       </p:sp>
@@ -9542,23 +9688,25 @@
           </a:p>
           <a:p>
             <a:pPr lvl="1">
-              <a:buFont typeface="Courier New" pitchFamily="49" charset="0"/>
+              <a:buFont typeface="Courier New" panose="02070309020205020404" pitchFamily="49" charset="0"/>
               <a:buChar char="o"/>
             </a:pPr>
             <a:r>
               <a:rPr lang="en-US" sz="2400" dirty="0" smtClean="0"/>
               <a:t>break</a:t>
             </a:r>
+            <a:endParaRPr lang="en-US" sz="2400" dirty="0" smtClean="0"/>
           </a:p>
           <a:p>
             <a:pPr lvl="1">
-              <a:buFont typeface="Courier New" pitchFamily="49" charset="0"/>
+              <a:buFont typeface="Courier New" panose="02070309020205020404" pitchFamily="49" charset="0"/>
               <a:buChar char="o"/>
             </a:pPr>
             <a:r>
               <a:rPr lang="en-US" sz="2400" dirty="0" smtClean="0"/>
               <a:t>continue</a:t>
             </a:r>
+            <a:endParaRPr lang="en-US" sz="2400" dirty="0" smtClean="0"/>
           </a:p>
           <a:p>
             <a:pPr>
@@ -9580,6 +9728,11 @@
               </a:rPr>
               <a:t> </a:t>
             </a:r>
+            <a:endParaRPr lang="en-US" sz="2400" dirty="0" smtClean="0">
+              <a:solidFill>
+                <a:srgbClr val="0A83C0"/>
+              </a:solidFill>
+            </a:endParaRPr>
           </a:p>
           <a:p>
             <a:pPr algn="just"/>
@@ -9587,6 +9740,7 @@
               <a:rPr lang="en-US" sz="2400" dirty="0" smtClean="0"/>
               <a:t>The break is a keyword in python which is used to bring the program control out of the loop. </a:t>
             </a:r>
+            <a:endParaRPr lang="en-US" sz="2400" dirty="0" smtClean="0"/>
           </a:p>
           <a:p>
             <a:pPr algn="just"/>
@@ -9594,6 +9748,7 @@
               <a:rPr lang="en-US" sz="2400" dirty="0" smtClean="0"/>
               <a:t>The break statement breaks the loops one by one, i.e., in the case of nested loops, it breaks the inner loop first and then proceeds to outer loops. </a:t>
             </a:r>
+            <a:endParaRPr lang="en-US" sz="2400" dirty="0" smtClean="0"/>
           </a:p>
           <a:p>
             <a:pPr algn="just"/>
@@ -9601,6 +9756,7 @@
               <a:rPr lang="en-US" sz="2400" dirty="0" smtClean="0"/>
               <a:t>The break is commonly used in the cases where we need to break the loop for a given condition.</a:t>
             </a:r>
+            <a:endParaRPr lang="en-US" sz="2400" dirty="0" smtClean="0"/>
           </a:p>
           <a:p>
             <a:pPr>
@@ -10800,6 +10956,7 @@
               <a:rPr lang="en-US" sz="2000" b="1" dirty="0" smtClean="0"/>
               <a:t>Cont..</a:t>
             </a:r>
+            <a:endParaRPr lang="en-US" sz="2000" b="1" dirty="0" smtClean="0"/>
           </a:p>
         </p:txBody>
       </p:sp>
@@ -10844,24 +11001,32 @@
               </a:rPr>
               <a:t> </a:t>
             </a:r>
+            <a:endParaRPr lang="en-US" sz="2400" dirty="0" smtClean="0">
+              <a:solidFill>
+                <a:srgbClr val="0A83C0"/>
+              </a:solidFill>
+            </a:endParaRPr>
           </a:p>
           <a:p>
             <a:r>
               <a:rPr lang="en-US" sz="2400" dirty="0" smtClean="0"/>
               <a:t>The continue statement in python is used to bring the program control to the beginning of the loop. </a:t>
             </a:r>
+            <a:endParaRPr lang="en-US" sz="2400" dirty="0" smtClean="0"/>
           </a:p>
           <a:p>
             <a:r>
               <a:rPr lang="en-US" sz="2400" dirty="0" smtClean="0"/>
               <a:t>The continue statement skips the remaining lines of code inside the loop and start with the next iteration. </a:t>
             </a:r>
+            <a:endParaRPr lang="en-US" sz="2400" dirty="0" smtClean="0"/>
           </a:p>
           <a:p>
             <a:r>
               <a:rPr lang="en-US" sz="2400" dirty="0" smtClean="0"/>
               <a:t>It is mainly used for a particular condition inside the loop so that we can skip some specific code for a particular condition.</a:t>
             </a:r>
+            <a:endParaRPr lang="en-US" sz="2400" dirty="0" smtClean="0"/>
           </a:p>
           <a:p>
             <a:pPr>
@@ -10972,7 +11137,7 @@
                 <a:solidFill>
                   <a:srgbClr val="000000"/>
                 </a:solidFill>
-                <a:latin typeface="Consolas"/>
+                <a:latin typeface="Consolas" panose="020B0609020204030204"/>
               </a:rPr>
               <a:t>i</a:t>
             </a:r>
@@ -10981,16 +11146,19 @@
                 <a:solidFill>
                   <a:srgbClr val="000000"/>
                 </a:solidFill>
-                <a:latin typeface="Consolas"/>
+                <a:latin typeface="Consolas" panose="020B0609020204030204"/>
               </a:rPr>
               <a:t> = 1</a:t>
             </a:r>
             <a:r>
               <a:rPr lang="en-US" sz="2000" dirty="0" smtClean="0">
-                <a:latin typeface="Consolas"/>
+                <a:latin typeface="Consolas" panose="020B0609020204030204"/>
               </a:rPr>
               <a:t> </a:t>
             </a:r>
+            <a:endParaRPr lang="en-US" sz="2000" dirty="0" smtClean="0">
+              <a:latin typeface="Consolas" panose="020B0609020204030204"/>
+            </a:endParaRPr>
           </a:p>
           <a:p>
             <a:r>
@@ -10998,7 +11166,7 @@
                 <a:solidFill>
                   <a:srgbClr val="000000"/>
                 </a:solidFill>
-                <a:latin typeface="Consolas"/>
+                <a:latin typeface="Consolas" panose="020B0609020204030204"/>
               </a:rPr>
               <a:t>while </a:t>
             </a:r>
@@ -11007,7 +11175,7 @@
                 <a:solidFill>
                   <a:srgbClr val="000000"/>
                 </a:solidFill>
-                <a:latin typeface="Consolas"/>
+                <a:latin typeface="Consolas" panose="020B0609020204030204"/>
               </a:rPr>
               <a:t>i</a:t>
             </a:r>
@@ -11016,16 +11184,19 @@
                 <a:solidFill>
                   <a:srgbClr val="000000"/>
                 </a:solidFill>
-                <a:latin typeface="Consolas"/>
+                <a:latin typeface="Consolas" panose="020B0609020204030204"/>
               </a:rPr>
               <a:t> &lt; 6:</a:t>
             </a:r>
             <a:r>
               <a:rPr lang="en-US" sz="2000" dirty="0" smtClean="0">
-                <a:latin typeface="Consolas"/>
+                <a:latin typeface="Consolas" panose="020B0609020204030204"/>
               </a:rPr>
               <a:t> </a:t>
             </a:r>
+            <a:endParaRPr lang="en-US" sz="2000" dirty="0" smtClean="0">
+              <a:latin typeface="Consolas" panose="020B0609020204030204"/>
+            </a:endParaRPr>
           </a:p>
           <a:p>
             <a:r>
@@ -11033,7 +11204,7 @@
                 <a:solidFill>
                   <a:srgbClr val="0000FF"/>
                 </a:solidFill>
-                <a:latin typeface="Consolas"/>
+                <a:latin typeface="Consolas" panose="020B0609020204030204"/>
               </a:rPr>
               <a:t>	print</a:t>
             </a:r>
@@ -11042,7 +11213,7 @@
                 <a:solidFill>
                   <a:srgbClr val="000000"/>
                 </a:solidFill>
-                <a:latin typeface="Consolas"/>
+                <a:latin typeface="Consolas" panose="020B0609020204030204"/>
               </a:rPr>
               <a:t>(</a:t>
             </a:r>
@@ -11051,7 +11222,7 @@
                 <a:solidFill>
                   <a:srgbClr val="000000"/>
                 </a:solidFill>
-                <a:latin typeface="Consolas"/>
+                <a:latin typeface="Consolas" panose="020B0609020204030204"/>
               </a:rPr>
               <a:t>i</a:t>
             </a:r>
@@ -11060,16 +11231,19 @@
                 <a:solidFill>
                   <a:srgbClr val="000000"/>
                 </a:solidFill>
-                <a:latin typeface="Consolas"/>
+                <a:latin typeface="Consolas" panose="020B0609020204030204"/>
               </a:rPr>
               <a:t>)</a:t>
             </a:r>
             <a:r>
               <a:rPr lang="en-US" sz="2000" dirty="0" smtClean="0">
-                <a:latin typeface="Consolas"/>
+                <a:latin typeface="Consolas" panose="020B0609020204030204"/>
               </a:rPr>
               <a:t> </a:t>
             </a:r>
+            <a:endParaRPr lang="en-US" sz="2000" dirty="0" smtClean="0">
+              <a:latin typeface="Consolas" panose="020B0609020204030204"/>
+            </a:endParaRPr>
           </a:p>
           <a:p>
             <a:r>
@@ -11077,7 +11251,7 @@
                 <a:solidFill>
                   <a:srgbClr val="000000"/>
                 </a:solidFill>
-                <a:latin typeface="Consolas"/>
+                <a:latin typeface="Consolas" panose="020B0609020204030204"/>
               </a:rPr>
               <a:t>	if </a:t>
             </a:r>
@@ -11086,7 +11260,7 @@
                 <a:solidFill>
                   <a:srgbClr val="000000"/>
                 </a:solidFill>
-                <a:latin typeface="Consolas"/>
+                <a:latin typeface="Consolas" panose="020B0609020204030204"/>
               </a:rPr>
               <a:t>i</a:t>
             </a:r>
@@ -11095,16 +11269,19 @@
                 <a:solidFill>
                   <a:srgbClr val="000000"/>
                 </a:solidFill>
-                <a:latin typeface="Consolas"/>
+                <a:latin typeface="Consolas" panose="020B0609020204030204"/>
               </a:rPr>
               <a:t> == 3:</a:t>
             </a:r>
             <a:r>
               <a:rPr lang="en-US" sz="2000" dirty="0" smtClean="0">
-                <a:latin typeface="Consolas"/>
+                <a:latin typeface="Consolas" panose="020B0609020204030204"/>
               </a:rPr>
               <a:t> </a:t>
             </a:r>
+            <a:endParaRPr lang="en-US" sz="2000" dirty="0" smtClean="0">
+              <a:latin typeface="Consolas" panose="020B0609020204030204"/>
+            </a:endParaRPr>
           </a:p>
           <a:p>
             <a:r>
@@ -11112,16 +11289,19 @@
                 <a:solidFill>
                   <a:srgbClr val="0000FF"/>
                 </a:solidFill>
-                <a:latin typeface="Consolas"/>
+                <a:latin typeface="Consolas" panose="020B0609020204030204"/>
               </a:rPr>
               <a:t>		break</a:t>
             </a:r>
             <a:r>
               <a:rPr lang="en-US" sz="2000" dirty="0" smtClean="0">
-                <a:latin typeface="Consolas"/>
+                <a:latin typeface="Consolas" panose="020B0609020204030204"/>
               </a:rPr>
               <a:t> </a:t>
             </a:r>
+            <a:endParaRPr lang="en-US" sz="2000" dirty="0" smtClean="0">
+              <a:latin typeface="Consolas" panose="020B0609020204030204"/>
+            </a:endParaRPr>
           </a:p>
           <a:p>
             <a:r>
@@ -11129,7 +11309,7 @@
                 <a:solidFill>
                   <a:srgbClr val="000000"/>
                 </a:solidFill>
-                <a:latin typeface="Consolas"/>
+                <a:latin typeface="Consolas" panose="020B0609020204030204"/>
               </a:rPr>
               <a:t>	</a:t>
             </a:r>
@@ -11138,7 +11318,7 @@
                 <a:solidFill>
                   <a:srgbClr val="000000"/>
                 </a:solidFill>
-                <a:latin typeface="Consolas"/>
+                <a:latin typeface="Consolas" panose="020B0609020204030204"/>
               </a:rPr>
               <a:t>i</a:t>
             </a:r>
@@ -11147,13 +11327,13 @@
                 <a:solidFill>
                   <a:srgbClr val="000000"/>
                 </a:solidFill>
-                <a:latin typeface="Consolas"/>
+                <a:latin typeface="Consolas" panose="020B0609020204030204"/>
               </a:rPr>
               <a:t> += 1</a:t>
             </a:r>
             <a:r>
               <a:rPr lang="en-US" sz="2000" dirty="0" smtClean="0">
-                <a:latin typeface="Consolas"/>
+                <a:latin typeface="Consolas" panose="020B0609020204030204"/>
               </a:rPr>
               <a:t> </a:t>
             </a:r>
@@ -11214,18 +11394,21 @@
               <a:rPr lang="en-US" sz="2400" dirty="0" smtClean="0"/>
               <a:t> breakdemo.py</a:t>
             </a:r>
+            <a:endParaRPr lang="en-US" sz="2400" dirty="0" smtClean="0"/>
           </a:p>
           <a:p>
             <a:r>
               <a:rPr lang="en-US" sz="2400" dirty="0" smtClean="0"/>
               <a:t>1</a:t>
             </a:r>
+            <a:endParaRPr lang="en-US" sz="2400" dirty="0" smtClean="0"/>
           </a:p>
           <a:p>
             <a:r>
               <a:rPr lang="en-US" sz="2400" dirty="0" smtClean="0"/>
               <a:t>2</a:t>
             </a:r>
+            <a:endParaRPr lang="en-US" sz="2400" dirty="0" smtClean="0"/>
           </a:p>
           <a:p>
             <a:r>
@@ -12122,6 +12305,7 @@
               <a:rPr lang="en-US" sz="2000" b="1" dirty="0" smtClean="0"/>
               <a:t>Cont..</a:t>
             </a:r>
+            <a:endParaRPr lang="en-US" sz="2000" b="1" dirty="0" smtClean="0"/>
           </a:p>
         </p:txBody>
       </p:sp>
@@ -12210,7 +12394,7 @@
                 <a:solidFill>
                   <a:srgbClr val="008080"/>
                 </a:solidFill>
-                <a:latin typeface="Consolas"/>
+                <a:latin typeface="Consolas" panose="020B0609020204030204"/>
               </a:rPr>
               <a:t>str</a:t>
             </a:r>
@@ -12219,7 +12403,7 @@
                 <a:solidFill>
                   <a:srgbClr val="008080"/>
                 </a:solidFill>
-                <a:latin typeface="Consolas"/>
+                <a:latin typeface="Consolas" panose="020B0609020204030204"/>
               </a:rPr>
               <a:t> </a:t>
             </a:r>
@@ -12228,7 +12412,7 @@
                 <a:solidFill>
                   <a:srgbClr val="000000"/>
                 </a:solidFill>
-                <a:latin typeface="Consolas"/>
+                <a:latin typeface="Consolas" panose="020B0609020204030204"/>
               </a:rPr>
               <a:t>=</a:t>
             </a:r>
@@ -12237,7 +12421,7 @@
                 <a:solidFill>
                   <a:srgbClr val="008080"/>
                 </a:solidFill>
-                <a:latin typeface="Consolas"/>
+                <a:latin typeface="Consolas" panose="020B0609020204030204"/>
               </a:rPr>
               <a:t>input</a:t>
             </a:r>
@@ -12246,7 +12430,7 @@
                 <a:solidFill>
                   <a:srgbClr val="000000"/>
                 </a:solidFill>
-                <a:latin typeface="Consolas"/>
+                <a:latin typeface="Consolas" panose="020B0609020204030204"/>
               </a:rPr>
               <a:t>(</a:t>
             </a:r>
@@ -12255,7 +12439,7 @@
                 <a:solidFill>
                   <a:srgbClr val="FF00FF"/>
                 </a:solidFill>
-                <a:latin typeface="Consolas"/>
+                <a:latin typeface="Consolas" panose="020B0609020204030204"/>
               </a:rPr>
               <a:t>"Enter any String : "</a:t>
             </a:r>
@@ -12264,10 +12448,16 @@
                 <a:solidFill>
                   <a:srgbClr val="000000"/>
                 </a:solidFill>
-                <a:latin typeface="Consolas"/>
+                <a:latin typeface="Consolas" panose="020B0609020204030204"/>
               </a:rPr>
               <a:t>) </a:t>
             </a:r>
+            <a:endParaRPr lang="en-US" sz="2000" dirty="0" smtClean="0">
+              <a:solidFill>
+                <a:srgbClr val="000000"/>
+              </a:solidFill>
+              <a:latin typeface="Consolas" panose="020B0609020204030204"/>
+            </a:endParaRPr>
           </a:p>
           <a:p>
             <a:r>
@@ -12275,7 +12465,7 @@
                 <a:solidFill>
                   <a:srgbClr val="0000FF"/>
                 </a:solidFill>
-                <a:latin typeface="Consolas"/>
+                <a:latin typeface="Consolas" panose="020B0609020204030204"/>
               </a:rPr>
               <a:t>for </a:t>
             </a:r>
@@ -12284,7 +12474,7 @@
                 <a:solidFill>
                   <a:srgbClr val="000000"/>
                 </a:solidFill>
-                <a:latin typeface="Consolas"/>
+                <a:latin typeface="Consolas" panose="020B0609020204030204"/>
               </a:rPr>
               <a:t>i</a:t>
             </a:r>
@@ -12293,7 +12483,7 @@
                 <a:solidFill>
                   <a:srgbClr val="000000"/>
                 </a:solidFill>
-                <a:latin typeface="Consolas"/>
+                <a:latin typeface="Consolas" panose="020B0609020204030204"/>
               </a:rPr>
               <a:t> </a:t>
             </a:r>
@@ -12302,7 +12492,7 @@
                 <a:solidFill>
                   <a:srgbClr val="0000FF"/>
                 </a:solidFill>
-                <a:latin typeface="Consolas"/>
+                <a:latin typeface="Consolas" panose="020B0609020204030204"/>
               </a:rPr>
               <a:t>in </a:t>
             </a:r>
@@ -12311,7 +12501,7 @@
                 <a:solidFill>
                   <a:srgbClr val="008080"/>
                 </a:solidFill>
-                <a:latin typeface="Consolas"/>
+                <a:latin typeface="Consolas" panose="020B0609020204030204"/>
               </a:rPr>
               <a:t>str</a:t>
             </a:r>
@@ -12320,10 +12510,16 @@
                 <a:solidFill>
                   <a:srgbClr val="000000"/>
                 </a:solidFill>
-                <a:latin typeface="Consolas"/>
+                <a:latin typeface="Consolas" panose="020B0609020204030204"/>
               </a:rPr>
               <a:t>: </a:t>
             </a:r>
+            <a:endParaRPr lang="en-US" sz="2000" dirty="0" smtClean="0">
+              <a:solidFill>
+                <a:srgbClr val="000000"/>
+              </a:solidFill>
+              <a:latin typeface="Consolas" panose="020B0609020204030204"/>
+            </a:endParaRPr>
           </a:p>
           <a:p>
             <a:r>
@@ -12331,7 +12527,7 @@
                 <a:solidFill>
                   <a:srgbClr val="000000"/>
                 </a:solidFill>
-                <a:latin typeface="Consolas"/>
+                <a:latin typeface="Consolas" panose="020B0609020204030204"/>
               </a:rPr>
               <a:t>	</a:t>
             </a:r>
@@ -12340,7 +12536,7 @@
                 <a:solidFill>
                   <a:srgbClr val="0000FF"/>
                 </a:solidFill>
-                <a:latin typeface="Consolas"/>
+                <a:latin typeface="Consolas" panose="020B0609020204030204"/>
               </a:rPr>
               <a:t>if </a:t>
             </a:r>
@@ -12349,7 +12545,7 @@
                 <a:solidFill>
                   <a:srgbClr val="000000"/>
                 </a:solidFill>
-                <a:latin typeface="Consolas"/>
+                <a:latin typeface="Consolas" panose="020B0609020204030204"/>
               </a:rPr>
               <a:t>i</a:t>
             </a:r>
@@ -12358,7 +12554,7 @@
                 <a:solidFill>
                   <a:srgbClr val="000000"/>
                 </a:solidFill>
-                <a:latin typeface="Consolas"/>
+                <a:latin typeface="Consolas" panose="020B0609020204030204"/>
               </a:rPr>
               <a:t> == </a:t>
             </a:r>
@@ -12367,7 +12563,7 @@
                 <a:solidFill>
                   <a:srgbClr val="FF00FF"/>
                 </a:solidFill>
-                <a:latin typeface="Consolas"/>
+                <a:latin typeface="Consolas" panose="020B0609020204030204"/>
               </a:rPr>
               <a:t>'h'</a:t>
             </a:r>
@@ -12376,10 +12572,16 @@
                 <a:solidFill>
                   <a:srgbClr val="000000"/>
                 </a:solidFill>
-                <a:latin typeface="Consolas"/>
+                <a:latin typeface="Consolas" panose="020B0609020204030204"/>
               </a:rPr>
               <a:t>: </a:t>
             </a:r>
+            <a:endParaRPr lang="en-US" sz="2000" dirty="0" smtClean="0">
+              <a:solidFill>
+                <a:srgbClr val="000000"/>
+              </a:solidFill>
+              <a:latin typeface="Consolas" panose="020B0609020204030204"/>
+            </a:endParaRPr>
           </a:p>
           <a:p>
             <a:r>
@@ -12387,7 +12589,7 @@
                 <a:solidFill>
                   <a:srgbClr val="000000"/>
                 </a:solidFill>
-                <a:latin typeface="Consolas"/>
+                <a:latin typeface="Consolas" panose="020B0609020204030204"/>
               </a:rPr>
               <a:t>		</a:t>
             </a:r>
@@ -12396,7 +12598,7 @@
                 <a:solidFill>
                   <a:srgbClr val="0000FF"/>
                 </a:solidFill>
-                <a:latin typeface="Consolas"/>
+                <a:latin typeface="Consolas" panose="020B0609020204030204"/>
               </a:rPr>
               <a:t>continue</a:t>
             </a:r>
@@ -12405,16 +12607,19 @@
                 <a:solidFill>
                   <a:srgbClr val="000000"/>
                 </a:solidFill>
-                <a:latin typeface="Consolas"/>
+                <a:latin typeface="Consolas" panose="020B0609020204030204"/>
               </a:rPr>
               <a:t>;</a:t>
             </a:r>
             <a:r>
               <a:rPr lang="en-US" sz="2000" dirty="0" smtClean="0">
-                <a:latin typeface="Consolas"/>
+                <a:latin typeface="Consolas" panose="020B0609020204030204"/>
               </a:rPr>
               <a:t> </a:t>
             </a:r>
+            <a:endParaRPr lang="en-US" sz="2000" dirty="0" smtClean="0">
+              <a:latin typeface="Consolas" panose="020B0609020204030204"/>
+            </a:endParaRPr>
           </a:p>
           <a:p>
             <a:r>
@@ -12422,7 +12627,7 @@
                 <a:solidFill>
                   <a:srgbClr val="0000FF"/>
                 </a:solidFill>
-                <a:latin typeface="Consolas"/>
+                <a:latin typeface="Consolas" panose="020B0609020204030204"/>
               </a:rPr>
               <a:t>	print</a:t>
             </a:r>
@@ -12431,7 +12636,7 @@
                 <a:solidFill>
                   <a:srgbClr val="000000"/>
                 </a:solidFill>
-                <a:latin typeface="Consolas"/>
+                <a:latin typeface="Consolas" panose="020B0609020204030204"/>
               </a:rPr>
               <a:t>(</a:t>
             </a:r>
@@ -12440,7 +12645,7 @@
                 <a:solidFill>
                   <a:srgbClr val="000000"/>
                 </a:solidFill>
-                <a:latin typeface="Consolas"/>
+                <a:latin typeface="Consolas" panose="020B0609020204030204"/>
               </a:rPr>
               <a:t>i,</a:t>
             </a:r>
@@ -12449,7 +12654,7 @@
                 <a:solidFill>
                   <a:srgbClr val="008080"/>
                 </a:solidFill>
-                <a:latin typeface="Consolas"/>
+                <a:latin typeface="Consolas" panose="020B0609020204030204"/>
               </a:rPr>
               <a:t>end</a:t>
             </a:r>
@@ -12458,7 +12663,7 @@
                 <a:solidFill>
                   <a:srgbClr val="000000"/>
                 </a:solidFill>
-                <a:latin typeface="Consolas"/>
+                <a:latin typeface="Consolas" panose="020B0609020204030204"/>
               </a:rPr>
               <a:t>=</a:t>
             </a:r>
@@ -12467,7 +12672,7 @@
                 <a:solidFill>
                   <a:srgbClr val="FF00FF"/>
                 </a:solidFill>
-                <a:latin typeface="Consolas"/>
+                <a:latin typeface="Consolas" panose="020B0609020204030204"/>
               </a:rPr>
               <a:t>" "</a:t>
             </a:r>
@@ -12476,13 +12681,13 @@
                 <a:solidFill>
                   <a:srgbClr val="000000"/>
                 </a:solidFill>
-                <a:latin typeface="Consolas"/>
+                <a:latin typeface="Consolas" panose="020B0609020204030204"/>
               </a:rPr>
               <a:t>);</a:t>
             </a:r>
             <a:r>
               <a:rPr lang="en-US" sz="2000" dirty="0" smtClean="0">
-                <a:latin typeface="Consolas"/>
+                <a:latin typeface="Consolas" panose="020B0609020204030204"/>
               </a:rPr>
               <a:t> </a:t>
             </a:r>
@@ -12543,18 +12748,21 @@
               <a:rPr lang="en-US" sz="2400" dirty="0" smtClean="0"/>
               <a:t> continuedemo.py</a:t>
             </a:r>
+            <a:endParaRPr lang="en-US" sz="2400" dirty="0" smtClean="0"/>
           </a:p>
           <a:p>
             <a:r>
               <a:rPr lang="en-US" sz="2400" dirty="0" smtClean="0"/>
               <a:t>Enter any String : python</a:t>
             </a:r>
+            <a:endParaRPr lang="en-US" sz="2400" dirty="0" smtClean="0"/>
           </a:p>
           <a:p>
             <a:r>
               <a:rPr lang="en-US" sz="2400" dirty="0" smtClean="0"/>
               <a:t>p y t o n</a:t>
             </a:r>
+            <a:endParaRPr lang="en-US" sz="2400" dirty="0" smtClean="0"/>
           </a:p>
         </p:txBody>
       </p:sp>
@@ -12955,6 +13163,11 @@
               </a:rPr>
               <a:t>Python</a:t>
             </a:r>
+            <a:endParaRPr lang="en-US" sz="3600" b="1" dirty="0" smtClean="0">
+              <a:solidFill>
+                <a:srgbClr val="0A83C0"/>
+              </a:solidFill>
+            </a:endParaRPr>
           </a:p>
         </p:txBody>
       </p:sp>
@@ -12985,6 +13198,7 @@
               <a:rPr lang="en-US" sz="2400" dirty="0" smtClean="0"/>
               <a:t>In Python, indentation is used to declare a block. If two statements are at the same indentation level, then they are the part of the same block.</a:t>
             </a:r>
+            <a:endParaRPr lang="en-US" sz="2400" dirty="0" smtClean="0"/>
           </a:p>
           <a:p>
             <a:pPr algn="just"/>
@@ -12996,6 +13210,7 @@
               <a:rPr lang="en-US" sz="2400" dirty="0" smtClean="0"/>
               <a:t>For the ease of programming and to achieve simplicity, python doesn't allow the use of curly braces or parentheses for the block level code.</a:t>
             </a:r>
+            <a:endParaRPr lang="en-US" sz="2400" dirty="0" smtClean="0"/>
           </a:p>
           <a:p>
             <a:pPr algn="just"/>
@@ -13007,6 +13222,7 @@
               <a:rPr lang="en-US" sz="2400" dirty="0" smtClean="0"/>
               <a:t>Indentation is the most used part of the python programming language.</a:t>
             </a:r>
+            <a:endParaRPr lang="en-US" sz="2400" dirty="0" smtClean="0"/>
           </a:p>
           <a:p>
             <a:pPr algn="just">
@@ -13020,6 +13236,7 @@
               <a:rPr lang="en-US" sz="2400" dirty="0" smtClean="0"/>
               <a:t>Generally, a tab space or four spaces are given to indent the statements in python.</a:t>
             </a:r>
+            <a:endParaRPr lang="en-US" sz="2400" dirty="0" smtClean="0"/>
           </a:p>
         </p:txBody>
       </p:sp>
@@ -13708,6 +13925,11 @@
               </a:rPr>
               <a:t>Python</a:t>
             </a:r>
+            <a:endParaRPr lang="en-US" sz="3600" b="1" dirty="0" smtClean="0">
+              <a:solidFill>
+                <a:srgbClr val="0A83C0"/>
+              </a:solidFill>
+            </a:endParaRPr>
           </a:p>
         </p:txBody>
       </p:sp>
@@ -13748,7 +13970,7 @@
           </a:p>
           <a:p>
             <a:pPr lvl="1">
-              <a:buFont typeface="Courier New" pitchFamily="49" charset="0"/>
+              <a:buFont typeface="Courier New" panose="02070309020205020404" pitchFamily="49" charset="0"/>
               <a:buChar char="o"/>
             </a:pPr>
             <a:r>
@@ -13759,7 +13981,7 @@
           </a:p>
           <a:p>
             <a:pPr lvl="1">
-              <a:buFont typeface="Courier New" pitchFamily="49" charset="0"/>
+              <a:buFont typeface="Courier New" panose="02070309020205020404" pitchFamily="49" charset="0"/>
               <a:buChar char="o"/>
             </a:pPr>
             <a:r>
@@ -13770,13 +13992,14 @@
           </a:p>
           <a:p>
             <a:pPr lvl="1">
-              <a:buFont typeface="Courier New" pitchFamily="49" charset="0"/>
+              <a:buFont typeface="Courier New" panose="02070309020205020404" pitchFamily="49" charset="0"/>
               <a:buChar char="o"/>
             </a:pPr>
             <a:r>
               <a:rPr lang="en-US" sz="2400" dirty="0" smtClean="0"/>
               <a:t>if – elif –else</a:t>
             </a:r>
+            <a:endParaRPr lang="en-US" sz="2400" dirty="0" smtClean="0"/>
           </a:p>
           <a:p>
             <a:pPr>
@@ -13798,12 +14021,18 @@
               </a:rPr>
               <a:t> </a:t>
             </a:r>
+            <a:endParaRPr lang="en-US" sz="2400" dirty="0" smtClean="0">
+              <a:solidFill>
+                <a:srgbClr val="0A83C0"/>
+              </a:solidFill>
+            </a:endParaRPr>
           </a:p>
           <a:p>
             <a:r>
               <a:rPr lang="en-US" sz="2400" dirty="0" smtClean="0"/>
               <a:t>The if statement is used to test a specific condition. If the condition is true, a block of code (if-block) will be executed.</a:t>
             </a:r>
+            <a:endParaRPr lang="en-US" sz="2400" dirty="0" smtClean="0"/>
           </a:p>
           <a:p>
             <a:pPr>
@@ -13835,6 +14064,7 @@
               <a:rPr lang="en-US" dirty="0" smtClean="0"/>
               <a:t>  </a:t>
             </a:r>
+            <a:endParaRPr lang="en-US" dirty="0" smtClean="0"/>
           </a:p>
           <a:p>
             <a:pPr lvl="2">
@@ -13844,6 +14074,7 @@
               <a:rPr lang="en-US" dirty="0" smtClean="0"/>
               <a:t>		statement1</a:t>
             </a:r>
+            <a:endParaRPr lang="en-US" dirty="0" smtClean="0"/>
           </a:p>
           <a:p>
             <a:pPr lvl="2">
@@ -15261,6 +15492,7 @@
               <a:rPr lang="en-US" sz="2000" b="1" dirty="0" smtClean="0"/>
               <a:t>Cont..</a:t>
             </a:r>
+            <a:endParaRPr lang="en-US" sz="2000" b="1" dirty="0" smtClean="0"/>
           </a:p>
         </p:txBody>
       </p:sp>
@@ -15375,15 +15607,15 @@
                 <a:solidFill>
                   <a:srgbClr val="000000"/>
                 </a:solidFill>
-                <a:latin typeface="Consolas"/>
-                <a:ea typeface="Times New Roman"/>
-                <a:cs typeface="Courier New"/>
+                <a:latin typeface="Consolas" panose="020B0609020204030204"/>
+                <a:ea typeface="Times New Roman" panose="02020603050405020304"/>
+                <a:cs typeface="Courier New" panose="02070309020205020404"/>
               </a:rPr>
               <a:t>a = 33</a:t>
             </a:r>
             <a:endParaRPr lang="en-US" sz="2000" dirty="0" smtClean="0">
-              <a:ea typeface="Calibri"/>
-              <a:cs typeface="Times New Roman"/>
+              <a:ea typeface="Calibri" panose="020F0502020204030204"/>
+              <a:cs typeface="Times New Roman" panose="02020603050405020304"/>
             </a:endParaRPr>
           </a:p>
           <a:p>
@@ -15418,15 +15650,15 @@
                 <a:solidFill>
                   <a:srgbClr val="000000"/>
                 </a:solidFill>
-                <a:latin typeface="Consolas"/>
-                <a:ea typeface="Times New Roman"/>
-                <a:cs typeface="Courier New"/>
+                <a:latin typeface="Consolas" panose="020B0609020204030204"/>
+                <a:ea typeface="Times New Roman" panose="02020603050405020304"/>
+                <a:cs typeface="Courier New" panose="02070309020205020404"/>
               </a:rPr>
               <a:t>b = 200</a:t>
             </a:r>
             <a:endParaRPr lang="en-US" sz="2000" dirty="0" smtClean="0">
-              <a:ea typeface="Calibri"/>
-              <a:cs typeface="Times New Roman"/>
+              <a:ea typeface="Calibri" panose="020F0502020204030204"/>
+              <a:cs typeface="Times New Roman" panose="02020603050405020304"/>
             </a:endParaRPr>
           </a:p>
           <a:p>
@@ -15461,15 +15693,15 @@
                 <a:solidFill>
                   <a:srgbClr val="000000"/>
                 </a:solidFill>
-                <a:latin typeface="Consolas"/>
-                <a:ea typeface="Times New Roman"/>
-                <a:cs typeface="Courier New"/>
+                <a:latin typeface="Consolas" panose="020B0609020204030204"/>
+                <a:ea typeface="Times New Roman" panose="02020603050405020304"/>
+                <a:cs typeface="Courier New" panose="02070309020205020404"/>
               </a:rPr>
               <a:t>if b &gt; a:</a:t>
             </a:r>
             <a:endParaRPr lang="en-US" sz="2000" dirty="0" smtClean="0">
-              <a:ea typeface="Calibri"/>
-              <a:cs typeface="Times New Roman"/>
+              <a:ea typeface="Calibri" panose="020F0502020204030204"/>
+              <a:cs typeface="Times New Roman" panose="02020603050405020304"/>
             </a:endParaRPr>
           </a:p>
           <a:p>
@@ -15501,9 +15733,9 @@
             </a:pPr>
             <a:r>
               <a:rPr lang="en-US" sz="2000" dirty="0" smtClean="0">
-                <a:latin typeface="Consolas"/>
-                <a:ea typeface="Times New Roman"/>
-                <a:cs typeface="Courier New"/>
+                <a:latin typeface="Consolas" panose="020B0609020204030204"/>
+                <a:ea typeface="Times New Roman" panose="02020603050405020304"/>
+                <a:cs typeface="Courier New" panose="02070309020205020404"/>
               </a:rPr>
               <a:t>  </a:t>
             </a:r>
@@ -15512,9 +15744,9 @@
                 <a:solidFill>
                   <a:srgbClr val="0000FF"/>
                 </a:solidFill>
-                <a:latin typeface="Consolas"/>
-                <a:ea typeface="Times New Roman"/>
-                <a:cs typeface="Courier New"/>
+                <a:latin typeface="Consolas" panose="020B0609020204030204"/>
+                <a:ea typeface="Times New Roman" panose="02020603050405020304"/>
+                <a:cs typeface="Courier New" panose="02070309020205020404"/>
               </a:rPr>
               <a:t>print </a:t>
             </a:r>
@@ -15523,9 +15755,9 @@
                 <a:solidFill>
                   <a:srgbClr val="000000"/>
                 </a:solidFill>
-                <a:latin typeface="Consolas"/>
-                <a:ea typeface="Times New Roman"/>
-                <a:cs typeface="Courier New"/>
+                <a:latin typeface="Consolas" panose="020B0609020204030204"/>
+                <a:ea typeface="Times New Roman" panose="02020603050405020304"/>
+                <a:cs typeface="Courier New" panose="02070309020205020404"/>
               </a:rPr>
               <a:t>(</a:t>
             </a:r>
@@ -15534,9 +15766,9 @@
                 <a:solidFill>
                   <a:srgbClr val="FF00FF"/>
                 </a:solidFill>
-                <a:latin typeface="Consolas"/>
-                <a:ea typeface="Times New Roman"/>
-                <a:cs typeface="Courier New"/>
+                <a:latin typeface="Consolas" panose="020B0609020204030204"/>
+                <a:ea typeface="Times New Roman" panose="02020603050405020304"/>
+                <a:cs typeface="Courier New" panose="02070309020205020404"/>
               </a:rPr>
               <a:t>"b is greater than a"</a:t>
             </a:r>
@@ -15545,15 +15777,15 @@
                 <a:solidFill>
                   <a:srgbClr val="000000"/>
                 </a:solidFill>
-                <a:latin typeface="Consolas"/>
-                <a:ea typeface="Times New Roman"/>
-                <a:cs typeface="Courier New"/>
+                <a:latin typeface="Consolas" panose="020B0609020204030204"/>
+                <a:ea typeface="Times New Roman" panose="02020603050405020304"/>
+                <a:cs typeface="Courier New" panose="02070309020205020404"/>
               </a:rPr>
               <a:t>)</a:t>
             </a:r>
             <a:endParaRPr lang="en-US" sz="2000" dirty="0" smtClean="0">
-              <a:ea typeface="Calibri"/>
-              <a:cs typeface="Times New Roman"/>
+              <a:ea typeface="Calibri" panose="020F0502020204030204"/>
+              <a:cs typeface="Times New Roman" panose="02020603050405020304"/>
             </a:endParaRPr>
           </a:p>
           <a:p>
@@ -15585,9 +15817,9 @@
             </a:pPr>
             <a:r>
               <a:rPr lang="en-US" sz="2000" dirty="0" smtClean="0">
-                <a:latin typeface="Consolas"/>
-                <a:ea typeface="Times New Roman"/>
-                <a:cs typeface="Courier New"/>
+                <a:latin typeface="Consolas" panose="020B0609020204030204"/>
+                <a:ea typeface="Times New Roman" panose="02020603050405020304"/>
+                <a:cs typeface="Courier New" panose="02070309020205020404"/>
               </a:rPr>
               <a:t>  </a:t>
             </a:r>
@@ -15596,9 +15828,9 @@
                 <a:solidFill>
                   <a:srgbClr val="0000FF"/>
                 </a:solidFill>
-                <a:latin typeface="Consolas"/>
-                <a:ea typeface="Times New Roman"/>
-                <a:cs typeface="Courier New"/>
+                <a:latin typeface="Consolas" panose="020B0609020204030204"/>
+                <a:ea typeface="Times New Roman" panose="02020603050405020304"/>
+                <a:cs typeface="Courier New" panose="02070309020205020404"/>
               </a:rPr>
               <a:t>print </a:t>
             </a:r>
@@ -15607,9 +15839,9 @@
                 <a:solidFill>
                   <a:srgbClr val="000000"/>
                 </a:solidFill>
-                <a:latin typeface="Consolas"/>
-                <a:ea typeface="Times New Roman"/>
-                <a:cs typeface="Courier New"/>
+                <a:latin typeface="Consolas" panose="020B0609020204030204"/>
+                <a:ea typeface="Times New Roman" panose="02020603050405020304"/>
+                <a:cs typeface="Courier New" panose="02070309020205020404"/>
               </a:rPr>
               <a:t>(</a:t>
             </a:r>
@@ -15618,9 +15850,9 @@
                 <a:solidFill>
                   <a:srgbClr val="FF00FF"/>
                 </a:solidFill>
-                <a:latin typeface="Consolas"/>
-                <a:ea typeface="Times New Roman"/>
-                <a:cs typeface="Courier New"/>
+                <a:latin typeface="Consolas" panose="020B0609020204030204"/>
+                <a:ea typeface="Times New Roman" panose="02020603050405020304"/>
+                <a:cs typeface="Courier New" panose="02070309020205020404"/>
               </a:rPr>
               <a:t>"done…"</a:t>
             </a:r>
@@ -15629,15 +15861,15 @@
                 <a:solidFill>
                   <a:srgbClr val="000000"/>
                 </a:solidFill>
-                <a:latin typeface="Consolas"/>
-                <a:ea typeface="Times New Roman"/>
-                <a:cs typeface="Courier New"/>
+                <a:latin typeface="Consolas" panose="020B0609020204030204"/>
+                <a:ea typeface="Times New Roman" panose="02020603050405020304"/>
+                <a:cs typeface="Courier New" panose="02070309020205020404"/>
               </a:rPr>
               <a:t>)</a:t>
             </a:r>
             <a:endParaRPr lang="en-US" sz="2000" dirty="0">
-              <a:ea typeface="Calibri"/>
-              <a:cs typeface="Times New Roman"/>
+              <a:ea typeface="Calibri" panose="020F0502020204030204"/>
+              <a:cs typeface="Times New Roman" panose="02020603050405020304"/>
             </a:endParaRPr>
           </a:p>
         </p:txBody>
@@ -15696,6 +15928,7 @@
               <a:rPr lang="en-US" sz="2400" dirty="0" smtClean="0"/>
               <a:t>function is used to get input from user.</a:t>
             </a:r>
+            <a:endParaRPr lang="en-US" sz="2400" dirty="0" smtClean="0"/>
           </a:p>
           <a:p>
             <a:r>
@@ -15718,6 +15951,11 @@
               </a:rPr>
               <a:t>  </a:t>
             </a:r>
+            <a:endParaRPr lang="en-US" sz="2400" b="1" dirty="0" smtClean="0">
+              <a:solidFill>
+                <a:srgbClr val="0A83C0"/>
+              </a:solidFill>
+            </a:endParaRPr>
           </a:p>
           <a:p>
             <a:r>
@@ -15728,6 +15966,7 @@
               <a:rPr lang="en-US" sz="2400" dirty="0" smtClean="0"/>
               <a:t>a=input (“Enter a value”)</a:t>
             </a:r>
+            <a:endParaRPr lang="en-US" sz="2400" dirty="0" smtClean="0"/>
           </a:p>
           <a:p>
             <a:pPr>
@@ -15790,18 +16029,21 @@
               <a:rPr lang="en-US" sz="2400" dirty="0" smtClean="0"/>
               <a:t> ifdemo.py</a:t>
             </a:r>
+            <a:endParaRPr lang="en-US" sz="2400" dirty="0" smtClean="0"/>
           </a:p>
           <a:p>
             <a:r>
               <a:rPr lang="en-US" sz="2400" dirty="0" smtClean="0"/>
               <a:t>b is greater than a</a:t>
             </a:r>
+            <a:endParaRPr lang="en-US" sz="2400" dirty="0" smtClean="0"/>
           </a:p>
           <a:p>
             <a:r>
               <a:rPr lang="en-US" sz="2400" dirty="0" smtClean="0"/>
               <a:t>done…</a:t>
             </a:r>
+            <a:endParaRPr lang="en-US" sz="2400" dirty="0" smtClean="0"/>
           </a:p>
           <a:p>
             <a:pPr>
@@ -16277,6 +16519,11 @@
               </a:rPr>
               <a:t> </a:t>
             </a:r>
+            <a:endParaRPr lang="en-US" sz="2400" dirty="0" smtClean="0">
+              <a:solidFill>
+                <a:srgbClr val="0A83C0"/>
+              </a:solidFill>
+            </a:endParaRPr>
           </a:p>
           <a:p>
             <a:pPr algn="just"/>
@@ -16284,6 +16531,7 @@
               <a:rPr lang="en-US" sz="2200" dirty="0" smtClean="0"/>
               <a:t>The if-else statement provides an else block combined with the if statement which is executed in the false case of the condition. </a:t>
             </a:r>
+            <a:endParaRPr lang="en-US" sz="2200" dirty="0" smtClean="0"/>
           </a:p>
           <a:p>
             <a:pPr>
@@ -16307,6 +16555,7 @@
               <a:rPr lang="en-US" sz="2000" dirty="0" smtClean="0"/>
               <a:t> condition:  </a:t>
             </a:r>
+            <a:endParaRPr lang="en-US" sz="2000" dirty="0" smtClean="0"/>
           </a:p>
           <a:p>
             <a:pPr>
@@ -16328,6 +16577,7 @@
               <a:rPr lang="en-US" sz="2000" dirty="0" smtClean="0"/>
               <a:t>   </a:t>
             </a:r>
+            <a:endParaRPr lang="en-US" sz="2000" dirty="0" smtClean="0"/>
           </a:p>
           <a:p>
             <a:pPr>
@@ -16341,6 +16591,7 @@
               <a:rPr lang="en-US" sz="2000" dirty="0" smtClean="0"/>
               <a:t>:   </a:t>
             </a:r>
+            <a:endParaRPr lang="en-US" sz="2000" dirty="0" smtClean="0"/>
           </a:p>
           <a:p>
             <a:pPr>
@@ -16366,6 +16617,7 @@
               <a:rPr lang="en-US" sz="2200" dirty="0" smtClean="0"/>
               <a:t>   </a:t>
             </a:r>
+            <a:endParaRPr lang="en-US" sz="2200" dirty="0" smtClean="0"/>
           </a:p>
           <a:p>
             <a:pPr lvl="2">
@@ -16460,7 +16712,7 @@
                 <a:solidFill>
                   <a:srgbClr val="000000"/>
                 </a:solidFill>
-                <a:latin typeface="Consolas"/>
+                <a:latin typeface="Consolas" panose="020B0609020204030204"/>
               </a:rPr>
               <a:t>age = </a:t>
             </a:r>
@@ -16469,7 +16721,7 @@
                 <a:solidFill>
                   <a:srgbClr val="000000"/>
                 </a:solidFill>
-                <a:latin typeface="Consolas"/>
+                <a:latin typeface="Consolas" panose="020B0609020204030204"/>
               </a:rPr>
               <a:t>int</a:t>
             </a:r>
@@ -16478,7 +16730,7 @@
                 <a:solidFill>
                   <a:srgbClr val="000000"/>
                 </a:solidFill>
-                <a:latin typeface="Consolas"/>
+                <a:latin typeface="Consolas" panose="020B0609020204030204"/>
               </a:rPr>
               <a:t>(</a:t>
             </a:r>
@@ -16487,7 +16739,7 @@
                 <a:solidFill>
                   <a:srgbClr val="008080"/>
                 </a:solidFill>
-                <a:latin typeface="Consolas"/>
+                <a:latin typeface="Consolas" panose="020B0609020204030204"/>
               </a:rPr>
               <a:t>input</a:t>
             </a:r>
@@ -16496,7 +16748,7 @@
                 <a:solidFill>
                   <a:srgbClr val="000000"/>
                 </a:solidFill>
-                <a:latin typeface="Consolas"/>
+                <a:latin typeface="Consolas" panose="020B0609020204030204"/>
               </a:rPr>
               <a:t>(</a:t>
             </a:r>
@@ -16505,7 +16757,7 @@
                 <a:solidFill>
                   <a:srgbClr val="FF00FF"/>
                 </a:solidFill>
-                <a:latin typeface="Consolas"/>
+                <a:latin typeface="Consolas" panose="020B0609020204030204"/>
               </a:rPr>
               <a:t>"Enter your age : "</a:t>
             </a:r>
@@ -16514,16 +16766,19 @@
                 <a:solidFill>
                   <a:srgbClr val="000000"/>
                 </a:solidFill>
-                <a:latin typeface="Consolas"/>
+                <a:latin typeface="Consolas" panose="020B0609020204030204"/>
               </a:rPr>
               <a:t>))  </a:t>
             </a:r>
             <a:r>
               <a:rPr lang="en-US" sz="2000" dirty="0" smtClean="0">
-                <a:latin typeface="Consolas"/>
+                <a:latin typeface="Consolas" panose="020B0609020204030204"/>
               </a:rPr>
               <a:t> </a:t>
             </a:r>
+            <a:endParaRPr lang="en-US" sz="2000" dirty="0" smtClean="0">
+              <a:latin typeface="Consolas" panose="020B0609020204030204"/>
+            </a:endParaRPr>
           </a:p>
           <a:p>
             <a:r>
@@ -16531,7 +16786,7 @@
                 <a:solidFill>
                   <a:srgbClr val="000000"/>
                 </a:solidFill>
-                <a:latin typeface="Consolas"/>
+                <a:latin typeface="Consolas" panose="020B0609020204030204"/>
               </a:rPr>
               <a:t>if age&gt;=</a:t>
             </a:r>
@@ -16540,7 +16795,7 @@
                 <a:solidFill>
                   <a:srgbClr val="800080"/>
                 </a:solidFill>
-                <a:latin typeface="Consolas"/>
+                <a:latin typeface="Consolas" panose="020B0609020204030204"/>
               </a:rPr>
               <a:t>18</a:t>
             </a:r>
@@ -16549,13 +16804,13 @@
                 <a:solidFill>
                   <a:srgbClr val="000000"/>
                 </a:solidFill>
-                <a:latin typeface="Consolas"/>
+                <a:latin typeface="Consolas" panose="020B0609020204030204"/>
               </a:rPr>
               <a:t>:  </a:t>
             </a:r>
             <a:r>
               <a:rPr lang="en-US" sz="2000" dirty="0" smtClean="0">
-                <a:latin typeface="Consolas"/>
+                <a:latin typeface="Consolas" panose="020B0609020204030204"/>
               </a:rPr>
               <a:t> </a:t>
             </a:r>
@@ -16564,10 +16819,16 @@
                 <a:solidFill>
                   <a:srgbClr val="000000"/>
                 </a:solidFill>
-                <a:latin typeface="Consolas"/>
+                <a:latin typeface="Consolas" panose="020B0609020204030204"/>
               </a:rPr>
               <a:t>    </a:t>
             </a:r>
+            <a:endParaRPr lang="en-US" sz="2000" dirty="0" smtClean="0">
+              <a:solidFill>
+                <a:srgbClr val="000000"/>
+              </a:solidFill>
+              <a:latin typeface="Consolas" panose="020B0609020204030204"/>
+            </a:endParaRPr>
           </a:p>
           <a:p>
             <a:r>
@@ -16575,7 +16836,7 @@
                 <a:solidFill>
                   <a:srgbClr val="000000"/>
                 </a:solidFill>
-                <a:latin typeface="Consolas"/>
+                <a:latin typeface="Consolas" panose="020B0609020204030204"/>
               </a:rPr>
               <a:t>	print(</a:t>
             </a:r>
@@ -16584,7 +16845,7 @@
                 <a:solidFill>
                   <a:srgbClr val="FF00FF"/>
                 </a:solidFill>
-                <a:latin typeface="Consolas"/>
+                <a:latin typeface="Consolas" panose="020B0609020204030204"/>
               </a:rPr>
               <a:t>"You are eligible to vote !!"</a:t>
             </a:r>
@@ -16593,16 +16854,19 @@
                 <a:solidFill>
                   <a:srgbClr val="000000"/>
                 </a:solidFill>
-                <a:latin typeface="Consolas"/>
+                <a:latin typeface="Consolas" panose="020B0609020204030204"/>
               </a:rPr>
               <a:t>)  </a:t>
             </a:r>
             <a:r>
               <a:rPr lang="en-US" sz="2000" dirty="0" smtClean="0">
-                <a:latin typeface="Consolas"/>
+                <a:latin typeface="Consolas" panose="020B0609020204030204"/>
               </a:rPr>
               <a:t> </a:t>
             </a:r>
+            <a:endParaRPr lang="en-US" sz="2000" dirty="0" smtClean="0">
+              <a:latin typeface="Consolas" panose="020B0609020204030204"/>
+            </a:endParaRPr>
           </a:p>
           <a:p>
             <a:r>
@@ -16610,7 +16874,7 @@
                 <a:solidFill>
                   <a:srgbClr val="0000FF"/>
                 </a:solidFill>
-                <a:latin typeface="Consolas"/>
+                <a:latin typeface="Consolas" panose="020B0609020204030204"/>
               </a:rPr>
               <a:t>else</a:t>
             </a:r>
@@ -16619,13 +16883,13 @@
                 <a:solidFill>
                   <a:srgbClr val="000000"/>
                 </a:solidFill>
-                <a:latin typeface="Consolas"/>
+                <a:latin typeface="Consolas" panose="020B0609020204030204"/>
               </a:rPr>
               <a:t>:  </a:t>
             </a:r>
             <a:r>
               <a:rPr lang="en-US" sz="2000" dirty="0" smtClean="0">
-                <a:latin typeface="Consolas"/>
+                <a:latin typeface="Consolas" panose="020B0609020204030204"/>
               </a:rPr>
               <a:t> </a:t>
             </a:r>
@@ -16634,10 +16898,16 @@
                 <a:solidFill>
                   <a:srgbClr val="000000"/>
                 </a:solidFill>
-                <a:latin typeface="Consolas"/>
+                <a:latin typeface="Consolas" panose="020B0609020204030204"/>
               </a:rPr>
               <a:t>    </a:t>
             </a:r>
+            <a:endParaRPr lang="en-US" sz="2000" dirty="0" smtClean="0">
+              <a:solidFill>
+                <a:srgbClr val="000000"/>
+              </a:solidFill>
+              <a:latin typeface="Consolas" panose="020B0609020204030204"/>
+            </a:endParaRPr>
           </a:p>
           <a:p>
             <a:r>
@@ -16645,7 +16915,7 @@
                 <a:solidFill>
                   <a:srgbClr val="000000"/>
                 </a:solidFill>
-                <a:latin typeface="Consolas"/>
+                <a:latin typeface="Consolas" panose="020B0609020204030204"/>
               </a:rPr>
               <a:t>	print(</a:t>
             </a:r>
@@ -16654,7 +16924,7 @@
                 <a:solidFill>
                   <a:srgbClr val="FF00FF"/>
                 </a:solidFill>
-                <a:latin typeface="Consolas"/>
+                <a:latin typeface="Consolas" panose="020B0609020204030204"/>
               </a:rPr>
               <a:t>"Sorry! you have to wait !!"</a:t>
             </a:r>
@@ -16663,13 +16933,13 @@
                 <a:solidFill>
                   <a:srgbClr val="000000"/>
                 </a:solidFill>
-                <a:latin typeface="Consolas"/>
+                <a:latin typeface="Consolas" panose="020B0609020204030204"/>
               </a:rPr>
               <a:t>))</a:t>
             </a:r>
             <a:r>
               <a:rPr lang="en-US" sz="2000" dirty="0" smtClean="0">
-                <a:latin typeface="Consolas"/>
+                <a:latin typeface="Consolas" panose="020B0609020204030204"/>
               </a:rPr>
               <a:t> </a:t>
             </a:r>
@@ -16734,12 +17004,14 @@
               <a:rPr lang="en-US" sz="2400" dirty="0" smtClean="0"/>
               <a:t> ifelsedemo.py</a:t>
             </a:r>
+            <a:endParaRPr lang="en-US" sz="2400" dirty="0" smtClean="0"/>
           </a:p>
           <a:p>
             <a:r>
               <a:rPr lang="en-US" sz="2400" dirty="0" smtClean="0"/>
               <a:t>Enter your age: 19</a:t>
             </a:r>
+            <a:endParaRPr lang="en-US" sz="2400" dirty="0" smtClean="0"/>
           </a:p>
           <a:p>
             <a:r>
@@ -17921,6 +18193,11 @@
               </a:rPr>
               <a:t> </a:t>
             </a:r>
+            <a:endParaRPr lang="en-US" sz="2400" dirty="0" smtClean="0">
+              <a:solidFill>
+                <a:srgbClr val="0A83C0"/>
+              </a:solidFill>
+            </a:endParaRPr>
           </a:p>
           <a:p>
             <a:pPr algn="just"/>
@@ -17928,6 +18205,7 @@
               <a:rPr lang="en-US" sz="2400" dirty="0" smtClean="0"/>
               <a:t>The elif statement enables us to check multiple conditions and execute the specific block of statements depending upon the true condition among them. </a:t>
             </a:r>
+            <a:endParaRPr lang="en-US" sz="2400" dirty="0" smtClean="0"/>
           </a:p>
           <a:p>
             <a:pPr>
@@ -17951,6 +18229,7 @@
               <a:rPr lang="en-US" sz="2400" dirty="0" smtClean="0"/>
               <a:t> condition1:   </a:t>
             </a:r>
+            <a:endParaRPr lang="en-US" sz="2400" dirty="0" smtClean="0"/>
           </a:p>
           <a:p>
             <a:pPr>
@@ -17972,6 +18251,7 @@
               <a:rPr lang="en-US" sz="2400" dirty="0" smtClean="0"/>
               <a:t>     </a:t>
             </a:r>
+            <a:endParaRPr lang="en-US" sz="2400" dirty="0" smtClean="0"/>
           </a:p>
           <a:p>
             <a:pPr>
@@ -17985,6 +18265,7 @@
               <a:rPr lang="en-US" sz="2400" dirty="0" smtClean="0"/>
               <a:t> condition2:   </a:t>
             </a:r>
+            <a:endParaRPr lang="en-US" sz="2400" dirty="0" smtClean="0"/>
           </a:p>
           <a:p>
             <a:pPr>
@@ -18006,6 +18287,7 @@
               <a:rPr lang="en-US" sz="2400" dirty="0" smtClean="0"/>
               <a:t>   </a:t>
             </a:r>
+            <a:endParaRPr lang="en-US" sz="2400" dirty="0" smtClean="0"/>
           </a:p>
           <a:p>
             <a:pPr>
@@ -18019,6 +18301,7 @@
               <a:rPr lang="en-US" sz="2400" dirty="0" smtClean="0"/>
               <a:t> condition3:   </a:t>
             </a:r>
+            <a:endParaRPr lang="en-US" sz="2400" dirty="0" smtClean="0"/>
           </a:p>
           <a:p>
             <a:pPr>
@@ -18040,6 +18323,7 @@
               <a:rPr lang="en-US" sz="2400" dirty="0" smtClean="0"/>
               <a:t>     </a:t>
             </a:r>
+            <a:endParaRPr lang="en-US" sz="2400" dirty="0" smtClean="0"/>
           </a:p>
           <a:p>
             <a:pPr>
@@ -18053,6 +18337,7 @@
               <a:rPr lang="en-US" sz="2400" dirty="0" smtClean="0"/>
               <a:t>:   </a:t>
             </a:r>
+            <a:endParaRPr lang="en-US" sz="2400" dirty="0" smtClean="0"/>
           </a:p>
           <a:p>
             <a:pPr>
@@ -19575,7 +19860,7 @@
                 <a:solidFill>
                   <a:srgbClr val="000000"/>
                 </a:solidFill>
-                <a:latin typeface="Consolas"/>
+                <a:latin typeface="Consolas" panose="020B0609020204030204"/>
               </a:rPr>
               <a:t>a=</a:t>
             </a:r>
@@ -19584,7 +19869,7 @@
                 <a:solidFill>
                   <a:srgbClr val="008080"/>
                 </a:solidFill>
-                <a:latin typeface="Consolas"/>
+                <a:latin typeface="Consolas" panose="020B0609020204030204"/>
               </a:rPr>
               <a:t>int</a:t>
             </a:r>
@@ -19593,7 +19878,7 @@
                 <a:solidFill>
                   <a:srgbClr val="000000"/>
                 </a:solidFill>
-                <a:latin typeface="Consolas"/>
+                <a:latin typeface="Consolas" panose="020B0609020204030204"/>
               </a:rPr>
               <a:t>(</a:t>
             </a:r>
@@ -19602,7 +19887,7 @@
                 <a:solidFill>
                   <a:srgbClr val="008080"/>
                 </a:solidFill>
-                <a:latin typeface="Consolas"/>
+                <a:latin typeface="Consolas" panose="020B0609020204030204"/>
               </a:rPr>
               <a:t>input</a:t>
             </a:r>
@@ -19611,7 +19896,7 @@
                 <a:solidFill>
                   <a:srgbClr val="000000"/>
                 </a:solidFill>
-                <a:latin typeface="Consolas"/>
+                <a:latin typeface="Consolas" panose="020B0609020204030204"/>
               </a:rPr>
               <a:t>(</a:t>
             </a:r>
@@ -19620,7 +19905,7 @@
                 <a:solidFill>
                   <a:srgbClr val="FF00FF"/>
                 </a:solidFill>
-                <a:latin typeface="Consolas"/>
+                <a:latin typeface="Consolas" panose="020B0609020204030204"/>
               </a:rPr>
               <a:t>"Enter a value : "</a:t>
             </a:r>
@@ -19629,16 +19914,19 @@
                 <a:solidFill>
                   <a:srgbClr val="000000"/>
                 </a:solidFill>
-                <a:latin typeface="Consolas"/>
+                <a:latin typeface="Consolas" panose="020B0609020204030204"/>
               </a:rPr>
               <a:t>))</a:t>
             </a:r>
             <a:r>
               <a:rPr lang="en-US" sz="2000" dirty="0" smtClean="0">
-                <a:latin typeface="Consolas"/>
+                <a:latin typeface="Consolas" panose="020B0609020204030204"/>
               </a:rPr>
               <a:t> </a:t>
             </a:r>
+            <a:endParaRPr lang="en-US" sz="2000" dirty="0" smtClean="0">
+              <a:latin typeface="Consolas" panose="020B0609020204030204"/>
+            </a:endParaRPr>
           </a:p>
           <a:p>
             <a:r>
@@ -19646,7 +19934,7 @@
                 <a:solidFill>
                   <a:srgbClr val="000000"/>
                 </a:solidFill>
-                <a:latin typeface="Consolas"/>
+                <a:latin typeface="Consolas" panose="020B0609020204030204"/>
               </a:rPr>
               <a:t>b=</a:t>
             </a:r>
@@ -19655,7 +19943,7 @@
                 <a:solidFill>
                   <a:srgbClr val="008080"/>
                 </a:solidFill>
-                <a:latin typeface="Consolas"/>
+                <a:latin typeface="Consolas" panose="020B0609020204030204"/>
               </a:rPr>
               <a:t>int</a:t>
             </a:r>
@@ -19664,7 +19952,7 @@
                 <a:solidFill>
                   <a:srgbClr val="000000"/>
                 </a:solidFill>
-                <a:latin typeface="Consolas"/>
+                <a:latin typeface="Consolas" panose="020B0609020204030204"/>
               </a:rPr>
               <a:t>(</a:t>
             </a:r>
@@ -19673,7 +19961,7 @@
                 <a:solidFill>
                   <a:srgbClr val="008080"/>
                 </a:solidFill>
-                <a:latin typeface="Consolas"/>
+                <a:latin typeface="Consolas" panose="020B0609020204030204"/>
               </a:rPr>
               <a:t>input</a:t>
             </a:r>
@@ -19682,7 +19970,7 @@
                 <a:solidFill>
                   <a:srgbClr val="000000"/>
                 </a:solidFill>
-                <a:latin typeface="Consolas"/>
+                <a:latin typeface="Consolas" panose="020B0609020204030204"/>
               </a:rPr>
               <a:t>(</a:t>
             </a:r>
@@ -19691,7 +19979,7 @@
                 <a:solidFill>
                   <a:srgbClr val="FF00FF"/>
                 </a:solidFill>
-                <a:latin typeface="Consolas"/>
+                <a:latin typeface="Consolas" panose="020B0609020204030204"/>
               </a:rPr>
               <a:t>"Enter b value : "</a:t>
             </a:r>
@@ -19700,16 +19988,19 @@
                 <a:solidFill>
                   <a:srgbClr val="000000"/>
                 </a:solidFill>
-                <a:latin typeface="Consolas"/>
+                <a:latin typeface="Consolas" panose="020B0609020204030204"/>
               </a:rPr>
               <a:t>))</a:t>
             </a:r>
             <a:r>
               <a:rPr lang="en-US" sz="2000" dirty="0" smtClean="0">
-                <a:latin typeface="Consolas"/>
+                <a:latin typeface="Consolas" panose="020B0609020204030204"/>
               </a:rPr>
               <a:t> </a:t>
             </a:r>
+            <a:endParaRPr lang="en-US" sz="2000" dirty="0" smtClean="0">
+              <a:latin typeface="Consolas" panose="020B0609020204030204"/>
+            </a:endParaRPr>
           </a:p>
           <a:p>
             <a:r>
@@ -19717,7 +20008,7 @@
                 <a:solidFill>
                   <a:srgbClr val="000000"/>
                 </a:solidFill>
-                <a:latin typeface="Consolas"/>
+                <a:latin typeface="Consolas" panose="020B0609020204030204"/>
               </a:rPr>
               <a:t>c=</a:t>
             </a:r>
@@ -19726,7 +20017,7 @@
                 <a:solidFill>
                   <a:srgbClr val="008080"/>
                 </a:solidFill>
-                <a:latin typeface="Consolas"/>
+                <a:latin typeface="Consolas" panose="020B0609020204030204"/>
               </a:rPr>
               <a:t>int</a:t>
             </a:r>
@@ -19735,7 +20026,7 @@
                 <a:solidFill>
                   <a:srgbClr val="000000"/>
                 </a:solidFill>
-                <a:latin typeface="Consolas"/>
+                <a:latin typeface="Consolas" panose="020B0609020204030204"/>
               </a:rPr>
               <a:t>(</a:t>
             </a:r>
@@ -19744,7 +20035,7 @@
                 <a:solidFill>
                   <a:srgbClr val="008080"/>
                 </a:solidFill>
-                <a:latin typeface="Consolas"/>
+                <a:latin typeface="Consolas" panose="020B0609020204030204"/>
               </a:rPr>
               <a:t>input</a:t>
             </a:r>
@@ -19753,7 +20044,7 @@
                 <a:solidFill>
                   <a:srgbClr val="000000"/>
                 </a:solidFill>
-                <a:latin typeface="Consolas"/>
+                <a:latin typeface="Consolas" panose="020B0609020204030204"/>
               </a:rPr>
               <a:t>(</a:t>
             </a:r>
@@ -19762,7 +20053,7 @@
                 <a:solidFill>
                   <a:srgbClr val="FF00FF"/>
                 </a:solidFill>
-                <a:latin typeface="Consolas"/>
+                <a:latin typeface="Consolas" panose="020B0609020204030204"/>
               </a:rPr>
               <a:t>"Enter c value : "</a:t>
             </a:r>
@@ -19771,16 +20062,19 @@
                 <a:solidFill>
                   <a:srgbClr val="000000"/>
                 </a:solidFill>
-                <a:latin typeface="Consolas"/>
+                <a:latin typeface="Consolas" panose="020B0609020204030204"/>
               </a:rPr>
               <a:t>))</a:t>
             </a:r>
             <a:r>
               <a:rPr lang="en-US" sz="2000" dirty="0" smtClean="0">
-                <a:latin typeface="Consolas"/>
+                <a:latin typeface="Consolas" panose="020B0609020204030204"/>
               </a:rPr>
               <a:t> </a:t>
             </a:r>
+            <a:endParaRPr lang="en-US" sz="2000" dirty="0" smtClean="0">
+              <a:latin typeface="Consolas" panose="020B0609020204030204"/>
+            </a:endParaRPr>
           </a:p>
           <a:p>
             <a:r>
@@ -19788,7 +20082,7 @@
                 <a:solidFill>
                   <a:srgbClr val="0000FF"/>
                 </a:solidFill>
-                <a:latin typeface="Consolas"/>
+                <a:latin typeface="Consolas" panose="020B0609020204030204"/>
               </a:rPr>
               <a:t>if </a:t>
             </a:r>
@@ -19797,7 +20091,7 @@
                 <a:solidFill>
                   <a:srgbClr val="000000"/>
                 </a:solidFill>
-                <a:latin typeface="Consolas"/>
+                <a:latin typeface="Consolas" panose="020B0609020204030204"/>
               </a:rPr>
               <a:t>(a&gt;b) </a:t>
             </a:r>
@@ -19806,7 +20100,7 @@
                 <a:solidFill>
                   <a:srgbClr val="0000FF"/>
                 </a:solidFill>
-                <a:latin typeface="Consolas"/>
+                <a:latin typeface="Consolas" panose="020B0609020204030204"/>
               </a:rPr>
               <a:t>and </a:t>
             </a:r>
@@ -19815,16 +20109,19 @@
                 <a:solidFill>
                   <a:srgbClr val="000000"/>
                 </a:solidFill>
-                <a:latin typeface="Consolas"/>
+                <a:latin typeface="Consolas" panose="020B0609020204030204"/>
               </a:rPr>
               <a:t>(a&gt;c):</a:t>
             </a:r>
             <a:r>
               <a:rPr lang="en-US" sz="2000" dirty="0" smtClean="0">
-                <a:latin typeface="Consolas"/>
+                <a:latin typeface="Consolas" panose="020B0609020204030204"/>
               </a:rPr>
               <a:t> </a:t>
             </a:r>
+            <a:endParaRPr lang="en-US" sz="2000" dirty="0" smtClean="0">
+              <a:latin typeface="Consolas" panose="020B0609020204030204"/>
+            </a:endParaRPr>
           </a:p>
           <a:p>
             <a:r>
@@ -19832,7 +20129,7 @@
                 <a:solidFill>
                   <a:srgbClr val="0000FF"/>
                 </a:solidFill>
-                <a:latin typeface="Consolas"/>
+                <a:latin typeface="Consolas" panose="020B0609020204030204"/>
               </a:rPr>
               <a:t>	print</a:t>
             </a:r>
@@ -19841,7 +20138,7 @@
                 <a:solidFill>
                   <a:srgbClr val="000000"/>
                 </a:solidFill>
-                <a:latin typeface="Consolas"/>
+                <a:latin typeface="Consolas" panose="020B0609020204030204"/>
               </a:rPr>
               <a:t>(</a:t>
             </a:r>
@@ -19850,7 +20147,7 @@
                 <a:solidFill>
                   <a:srgbClr val="FF00FF"/>
                 </a:solidFill>
-                <a:latin typeface="Consolas"/>
+                <a:latin typeface="Consolas" panose="020B0609020204030204"/>
               </a:rPr>
               <a:t>"Maximum value is :"</a:t>
             </a:r>
@@ -19859,16 +20156,19 @@
                 <a:solidFill>
                   <a:srgbClr val="000000"/>
                 </a:solidFill>
-                <a:latin typeface="Consolas"/>
+                <a:latin typeface="Consolas" panose="020B0609020204030204"/>
               </a:rPr>
               <a:t>,a)</a:t>
             </a:r>
             <a:r>
               <a:rPr lang="en-US" sz="2000" dirty="0" smtClean="0">
-                <a:latin typeface="Consolas"/>
+                <a:latin typeface="Consolas" panose="020B0609020204030204"/>
               </a:rPr>
               <a:t> </a:t>
             </a:r>
+            <a:endParaRPr lang="en-US" sz="2000" dirty="0" smtClean="0">
+              <a:latin typeface="Consolas" panose="020B0609020204030204"/>
+            </a:endParaRPr>
           </a:p>
           <a:p>
             <a:r>
@@ -19876,7 +20176,7 @@
                 <a:solidFill>
                   <a:srgbClr val="0000FF"/>
                 </a:solidFill>
-                <a:latin typeface="Consolas"/>
+                <a:latin typeface="Consolas" panose="020B0609020204030204"/>
               </a:rPr>
               <a:t>elif</a:t>
             </a:r>
@@ -19885,7 +20185,7 @@
                 <a:solidFill>
                   <a:srgbClr val="0000FF"/>
                 </a:solidFill>
-                <a:latin typeface="Consolas"/>
+                <a:latin typeface="Consolas" panose="020B0609020204030204"/>
               </a:rPr>
               <a:t> </a:t>
             </a:r>
@@ -19894,7 +20194,7 @@
                 <a:solidFill>
                   <a:srgbClr val="000000"/>
                 </a:solidFill>
-                <a:latin typeface="Consolas"/>
+                <a:latin typeface="Consolas" panose="020B0609020204030204"/>
               </a:rPr>
               <a:t>(b&gt;a) </a:t>
             </a:r>
@@ -19903,7 +20203,7 @@
                 <a:solidFill>
                   <a:srgbClr val="0000FF"/>
                 </a:solidFill>
-                <a:latin typeface="Consolas"/>
+                <a:latin typeface="Consolas" panose="020B0609020204030204"/>
               </a:rPr>
               <a:t>and </a:t>
             </a:r>
@@ -19912,16 +20212,19 @@
                 <a:solidFill>
                   <a:srgbClr val="000000"/>
                 </a:solidFill>
-                <a:latin typeface="Consolas"/>
+                <a:latin typeface="Consolas" panose="020B0609020204030204"/>
               </a:rPr>
               <a:t>(b&gt;c):</a:t>
             </a:r>
             <a:r>
               <a:rPr lang="en-US" sz="2000" dirty="0" smtClean="0">
-                <a:latin typeface="Consolas"/>
+                <a:latin typeface="Consolas" panose="020B0609020204030204"/>
               </a:rPr>
               <a:t> </a:t>
             </a:r>
+            <a:endParaRPr lang="en-US" sz="2000" dirty="0" smtClean="0">
+              <a:latin typeface="Consolas" panose="020B0609020204030204"/>
+            </a:endParaRPr>
           </a:p>
           <a:p>
             <a:r>
@@ -19929,7 +20232,7 @@
                 <a:solidFill>
                   <a:srgbClr val="0000FF"/>
                 </a:solidFill>
-                <a:latin typeface="Consolas"/>
+                <a:latin typeface="Consolas" panose="020B0609020204030204"/>
               </a:rPr>
               <a:t>	print</a:t>
             </a:r>
@@ -19938,7 +20241,7 @@
                 <a:solidFill>
                   <a:srgbClr val="000000"/>
                 </a:solidFill>
-                <a:latin typeface="Consolas"/>
+                <a:latin typeface="Consolas" panose="020B0609020204030204"/>
               </a:rPr>
               <a:t>(</a:t>
             </a:r>
@@ -19947,7 +20250,7 @@
                 <a:solidFill>
                   <a:srgbClr val="FF00FF"/>
                 </a:solidFill>
-                <a:latin typeface="Consolas"/>
+                <a:latin typeface="Consolas" panose="020B0609020204030204"/>
               </a:rPr>
               <a:t>"Maximum value is :"</a:t>
             </a:r>
@@ -19956,16 +20259,19 @@
                 <a:solidFill>
                   <a:srgbClr val="000000"/>
                 </a:solidFill>
-                <a:latin typeface="Consolas"/>
+                <a:latin typeface="Consolas" panose="020B0609020204030204"/>
               </a:rPr>
               <a:t>,b)</a:t>
             </a:r>
             <a:r>
               <a:rPr lang="en-US" sz="2000" dirty="0" smtClean="0">
-                <a:latin typeface="Consolas"/>
+                <a:latin typeface="Consolas" panose="020B0609020204030204"/>
               </a:rPr>
               <a:t> </a:t>
             </a:r>
+            <a:endParaRPr lang="en-US" sz="2000" dirty="0" smtClean="0">
+              <a:latin typeface="Consolas" panose="020B0609020204030204"/>
+            </a:endParaRPr>
           </a:p>
           <a:p>
             <a:r>
@@ -19973,7 +20279,7 @@
                 <a:solidFill>
                   <a:srgbClr val="0000FF"/>
                 </a:solidFill>
-                <a:latin typeface="Consolas"/>
+                <a:latin typeface="Consolas" panose="020B0609020204030204"/>
               </a:rPr>
               <a:t>else</a:t>
             </a:r>
@@ -19982,16 +20288,19 @@
                 <a:solidFill>
                   <a:srgbClr val="000000"/>
                 </a:solidFill>
-                <a:latin typeface="Consolas"/>
+                <a:latin typeface="Consolas" panose="020B0609020204030204"/>
               </a:rPr>
               <a:t>:</a:t>
             </a:r>
             <a:r>
               <a:rPr lang="en-US" sz="2000" dirty="0" smtClean="0">
-                <a:latin typeface="Consolas"/>
+                <a:latin typeface="Consolas" panose="020B0609020204030204"/>
               </a:rPr>
               <a:t> </a:t>
             </a:r>
+            <a:endParaRPr lang="en-US" sz="2000" dirty="0" smtClean="0">
+              <a:latin typeface="Consolas" panose="020B0609020204030204"/>
+            </a:endParaRPr>
           </a:p>
           <a:p>
             <a:r>
@@ -19999,7 +20308,7 @@
                 <a:solidFill>
                   <a:srgbClr val="0000FF"/>
                 </a:solidFill>
-                <a:latin typeface="Consolas"/>
+                <a:latin typeface="Consolas" panose="020B0609020204030204"/>
               </a:rPr>
               <a:t>	print</a:t>
             </a:r>
@@ -20008,7 +20317,7 @@
                 <a:solidFill>
                   <a:srgbClr val="000000"/>
                 </a:solidFill>
-                <a:latin typeface="Consolas"/>
+                <a:latin typeface="Consolas" panose="020B0609020204030204"/>
               </a:rPr>
               <a:t>(</a:t>
             </a:r>
@@ -20017,7 +20326,7 @@
                 <a:solidFill>
                   <a:srgbClr val="FF00FF"/>
                 </a:solidFill>
-                <a:latin typeface="Consolas"/>
+                <a:latin typeface="Consolas" panose="020B0609020204030204"/>
               </a:rPr>
               <a:t>"Maximum value is :"</a:t>
             </a:r>
@@ -20026,7 +20335,7 @@
                 <a:solidFill>
                   <a:srgbClr val="000000"/>
                 </a:solidFill>
-                <a:latin typeface="Consolas"/>
+                <a:latin typeface="Consolas" panose="020B0609020204030204"/>
               </a:rPr>
               <a:t>,c)</a:t>
             </a:r>
@@ -20035,13 +20344,13 @@
                 <a:solidFill>
                   <a:srgbClr val="000000"/>
                 </a:solidFill>
-                <a:latin typeface="Consolas"/>
+                <a:latin typeface="Consolas" panose="020B0609020204030204"/>
               </a:rPr>
               <a:t> </a:t>
             </a:r>
             <a:r>
               <a:rPr lang="en-US" sz="2400" dirty="0" smtClean="0">
-                <a:latin typeface="Consolas"/>
+                <a:latin typeface="Consolas" panose="020B0609020204030204"/>
               </a:rPr>
               <a:t> </a:t>
             </a:r>
@@ -20102,30 +20411,35 @@
               <a:rPr lang="en-US" sz="2200" dirty="0" smtClean="0"/>
               <a:t> maxnum.py</a:t>
             </a:r>
+            <a:endParaRPr lang="en-US" sz="2200" dirty="0" smtClean="0"/>
           </a:p>
           <a:p>
             <a:r>
               <a:rPr lang="en-US" sz="2200" dirty="0" smtClean="0"/>
               <a:t>Enter a value: 10</a:t>
             </a:r>
+            <a:endParaRPr lang="en-US" sz="2200" dirty="0" smtClean="0"/>
           </a:p>
           <a:p>
             <a:r>
               <a:rPr lang="en-US" sz="2200" dirty="0" smtClean="0"/>
               <a:t>Enter b value: 14</a:t>
             </a:r>
+            <a:endParaRPr lang="en-US" sz="2200" dirty="0" smtClean="0"/>
           </a:p>
           <a:p>
             <a:r>
               <a:rPr lang="en-US" sz="2200" dirty="0" smtClean="0"/>
               <a:t>Enter c value: 9</a:t>
             </a:r>
+            <a:endParaRPr lang="en-US" sz="2200" dirty="0" smtClean="0"/>
           </a:p>
           <a:p>
             <a:r>
               <a:rPr lang="en-US" sz="2200" dirty="0" smtClean="0"/>
               <a:t>Maximum value is: 14</a:t>
             </a:r>
+            <a:endParaRPr lang="en-US" sz="2200" dirty="0" smtClean="0"/>
           </a:p>
         </p:txBody>
       </p:sp>
@@ -20647,8 +20961,11 @@
       </a:bgFillStyleLst>
     </a:fmtScheme>
   </a:themeElements>
-  <a:objectDefaults/>
-  <a:extraClrSchemeLst/>
+  <a:extLst>
+    <a:ext uri="{05A4C25C-085E-4340-85A3-A5531E510DB2}">
+      <thm15:themeFamily xmlns:thm15="http://schemas.microsoft.com/office/thememl/2012/main" name="Office Theme" id="{62F939B6-93AF-4DB8-9C6B-D6C7DFDC589F}" vid="{4A3C46E8-61CC-4603-A589-7422A47A8E4A}"/>
+    </a:ext>
+  </a:extLst>
 </a:theme>
 </file>
 
@@ -20930,7 +21247,10 @@
       </a:bgFillStyleLst>
     </a:fmtScheme>
   </a:themeElements>
-  <a:objectDefaults/>
-  <a:extraClrSchemeLst/>
+  <a:extLst>
+    <a:ext uri="{05A4C25C-085E-4340-85A3-A5531E510DB2}">
+      <thm15:themeFamily xmlns:thm15="http://schemas.microsoft.com/office/thememl/2012/main" name="Office Theme" id="{62F939B6-93AF-4DB8-9C6B-D6C7DFDC589F}" vid="{4A3C46E8-61CC-4603-A589-7422A47A8E4A}"/>
+    </a:ext>
+  </a:extLst>
 </a:theme>
 </file>